--- a/D1S1_Intro_Personality_Profiling.pptx
+++ b/D1S1_Intro_Personality_Profiling.pptx
@@ -4,6 +4,9 @@
   <p:sldMasterIdLst>
     <p:sldMasterId id="2147483648" r:id="rId1"/>
   </p:sldMasterIdLst>
+  <p:notesMasterIdLst>
+    <p:notesMasterId r:id="rId12"/>
+  </p:notesMasterIdLst>
   <p:sldIdLst>
     <p:sldId id="256" r:id="rId2"/>
     <p:sldId id="257" r:id="rId3"/>
@@ -12,13 +15,11 @@
     <p:sldId id="260" r:id="rId6"/>
     <p:sldId id="261" r:id="rId7"/>
     <p:sldId id="262" r:id="rId8"/>
-    <p:sldId id="263" r:id="rId9"/>
-    <p:sldId id="264" r:id="rId10"/>
+    <p:sldId id="265" r:id="rId9"/>
+    <p:sldId id="263" r:id="rId10"/>
+    <p:sldId id="264" r:id="rId11"/>
   </p:sldIdLst>
-  <p:notesMasterIdLst>
-    <p:notesMasterId r:id="rId11"/>
-  </p:notesMasterIdLst>
-  <p:sldSz cx="9144000" cy="5143500"/>
+  <p:sldSz cx="9144000" cy="5143500" type="screen16x9"/>
   <p:notesSz cx="5143500" cy="9144000"/>
   <p:defaultTextStyle>
     <a:lvl1pPr marL="0" algn="l" defTabSz="914400" rtl="0" eaLnBrk="1" latinLnBrk="0" hangingPunct="1">
@@ -112,6 +113,11 @@
       </a:defRPr>
     </a:lvl9pPr>
   </p:defaultTextStyle>
+  <p:extLst>
+    <p:ext uri="{EFAFB233-063F-42B5-8137-9DF3F51BA10A}">
+      <p15:sldGuideLst xmlns:p15="http://schemas.microsoft.com/office/powerpoint/2012/main"/>
+    </p:ext>
+  </p:extLst>
 </p:presentation>
 </file>
 
@@ -137,234 +143,10 @@
           <a:chExt cx="0" cy="0"/>
         </a:xfrm>
       </p:grpSpPr>
-      <p:sp>
-        <p:nvSpPr>
-          <p:cNvPr id="2" name="Header Placeholder 1"/>
-          <p:cNvSpPr>
-            <a:spLocks noGrp="1"/>
-          </p:cNvSpPr>
-          <p:nvPr>
-            <p:ph type="hdr" sz="quarter"/>
-          </p:nvPr>
-        </p:nvSpPr>
-        <p:spPr>
-          <a:xfrm>
-            <a:off x="0" y="0"/>
-            <a:ext cx="2971800" cy="458788"/>
-          </a:xfrm>
-          <a:prstGeom prst="rect">
-            <a:avLst/>
-          </a:prstGeom>
-        </p:spPr>
-        <p:txBody>
-          <a:bodyPr vert="horz" lIns="91440" tIns="45720" rIns="91440" bIns="45720" rtlCol="0"/>
-          <a:lstStyle>
-            <a:lvl1pPr algn="l">
-              <a:defRPr sz="1200"/>
-            </a:lvl1pPr>
-          </a:lstStyle>
-          <a:p>
-            <a:endParaRPr lang="en-US"/>
-          </a:p>
-        </p:txBody>
-      </p:sp>
-      <p:sp>
-        <p:nvSpPr>
-          <p:cNvPr id="3" name="Date Placeholder 2"/>
-          <p:cNvSpPr>
-            <a:spLocks noGrp="1"/>
-          </p:cNvSpPr>
-          <p:nvPr>
-            <p:ph type="dt" idx="1"/>
-          </p:nvPr>
-        </p:nvSpPr>
-        <p:spPr>
-          <a:xfrm>
-            <a:off x="3884613" y="0"/>
-            <a:ext cx="2971800" cy="458788"/>
-          </a:xfrm>
-          <a:prstGeom prst="rect">
-            <a:avLst/>
-          </a:prstGeom>
-        </p:spPr>
-        <p:txBody>
-          <a:bodyPr vert="horz" lIns="91440" tIns="45720" rIns="91440" bIns="45720" rtlCol="0"/>
-          <a:lstStyle>
-            <a:lvl1pPr algn="r">
-              <a:defRPr sz="1200"/>
-            </a:lvl1pPr>
-          </a:lstStyle>
-          <a:p>
-            <a:fld id="{5282F153-3F37-0F45-9E97-73ACFA13230C}" type="datetimeFigureOut">
-              <a:rPr lang="en-US"/>
-              <a:t>7/23/19</a:t>
-            </a:fld>
-            <a:endParaRPr lang="en-US"/>
-          </a:p>
-        </p:txBody>
-      </p:sp>
-      <p:sp>
-        <p:nvSpPr>
-          <p:cNvPr id="4" name="Slide Image Placeholder 3"/>
-          <p:cNvSpPr>
-            <a:spLocks noGrp="1" noRot="1" noChangeAspect="1"/>
-          </p:cNvSpPr>
-          <p:nvPr>
-            <p:ph type="sldImg" idx="2"/>
-          </p:nvPr>
-        </p:nvSpPr>
-        <p:spPr>
-          <a:xfrm>
-            <a:off x="685800" y="1143000"/>
-            <a:ext cx="5486400" cy="3086100"/>
-          </a:xfrm>
-          <a:prstGeom prst="rect">
-            <a:avLst/>
-          </a:prstGeom>
-          <a:noFill/>
-          <a:ln w="12700">
-            <a:solidFill>
-              <a:prstClr val="black"/>
-            </a:solidFill>
-          </a:ln>
-        </p:spPr>
-        <p:txBody>
-          <a:bodyPr vert="horz" lIns="91440" tIns="45720" rIns="91440" bIns="45720" rtlCol="0" anchor="ctr"/>
-          <a:lstStyle/>
-          <a:p>
-            <a:endParaRPr lang="en-US"/>
-          </a:p>
-        </p:txBody>
-      </p:sp>
-      <p:sp>
-        <p:nvSpPr>
-          <p:cNvPr id="5" name="Notes Placeholder 4"/>
-          <p:cNvSpPr>
-            <a:spLocks noGrp="1"/>
-          </p:cNvSpPr>
-          <p:nvPr>
-            <p:ph type="body" sz="quarter" idx="3"/>
-          </p:nvPr>
-        </p:nvSpPr>
-        <p:spPr>
-          <a:xfrm>
-            <a:off x="685800" y="4400550"/>
-            <a:ext cx="5486400" cy="3600450"/>
-          </a:xfrm>
-          <a:prstGeom prst="rect">
-            <a:avLst/>
-          </a:prstGeom>
-        </p:spPr>
-        <p:txBody>
-          <a:bodyPr vert="horz" lIns="91440" tIns="45720" rIns="91440" bIns="45720" rtlCol="0"/>
-          <a:lstStyle/>
-          <a:p>
-            <a:pPr lvl="0"/>
-            <a:r>
-              <a:rPr lang="en-US"/>
-              <a:t>Click to edit Master text styles</a:t>
-            </a:r>
-          </a:p>
-          <a:p>
-            <a:pPr lvl="1"/>
-            <a:r>
-              <a:rPr lang="en-US"/>
-              <a:t>Second level</a:t>
-            </a:r>
-          </a:p>
-          <a:p>
-            <a:pPr lvl="2"/>
-            <a:r>
-              <a:rPr lang="en-US"/>
-              <a:t>Third level</a:t>
-            </a:r>
-          </a:p>
-          <a:p>
-            <a:pPr lvl="3"/>
-            <a:r>
-              <a:rPr lang="en-US"/>
-              <a:t>Fourth level</a:t>
-            </a:r>
-          </a:p>
-          <a:p>
-            <a:pPr lvl="4"/>
-            <a:r>
-              <a:rPr lang="en-US"/>
-              <a:t>Fifth level</a:t>
-            </a:r>
-          </a:p>
-        </p:txBody>
-      </p:sp>
-      <p:sp>
-        <p:nvSpPr>
-          <p:cNvPr id="6" name="Footer Placeholder 5"/>
-          <p:cNvSpPr>
-            <a:spLocks noGrp="1"/>
-          </p:cNvSpPr>
-          <p:nvPr>
-            <p:ph type="ftr" sz="quarter" idx="4"/>
-          </p:nvPr>
-        </p:nvSpPr>
-        <p:spPr>
-          <a:xfrm>
-            <a:off x="0" y="8685213"/>
-            <a:ext cx="2971800" cy="458787"/>
-          </a:xfrm>
-          <a:prstGeom prst="rect">
-            <a:avLst/>
-          </a:prstGeom>
-        </p:spPr>
-        <p:txBody>
-          <a:bodyPr vert="horz" lIns="91440" tIns="45720" rIns="91440" bIns="45720" rtlCol="0" anchor="b"/>
-          <a:lstStyle>
-            <a:lvl1pPr algn="l">
-              <a:defRPr sz="1200"/>
-            </a:lvl1pPr>
-          </a:lstStyle>
-          <a:p>
-            <a:endParaRPr lang="en-US"/>
-          </a:p>
-        </p:txBody>
-      </p:sp>
-      <p:sp>
-        <p:nvSpPr>
-          <p:cNvPr id="7" name="Slide Number Placeholder 6"/>
-          <p:cNvSpPr>
-            <a:spLocks noGrp="1"/>
-          </p:cNvSpPr>
-          <p:nvPr>
-            <p:ph type="sldNum" sz="quarter" idx="5"/>
-          </p:nvPr>
-        </p:nvSpPr>
-        <p:spPr>
-          <a:xfrm>
-            <a:off x="3884613" y="8685213"/>
-            <a:ext cx="2971800" cy="458787"/>
-          </a:xfrm>
-          <a:prstGeom prst="rect">
-            <a:avLst/>
-          </a:prstGeom>
-        </p:spPr>
-        <p:txBody>
-          <a:bodyPr vert="horz" lIns="91440" tIns="45720" rIns="91440" bIns="45720" rtlCol="0" anchor="b"/>
-          <a:lstStyle>
-            <a:lvl1pPr algn="r">
-              <a:defRPr sz="1200"/>
-            </a:lvl1pPr>
-          </a:lstStyle>
-          <a:p>
-            <a:fld id="{CE5E9CC1-C706-0F49-92D6-E571CC5EEA8F}" type="slidenum">
-              <a:rPr lang="en-US"/>
-              <a:t>‹#›</a:t>
-            </a:fld>
-            <a:endParaRPr lang="en-US"/>
-          </a:p>
-        </p:txBody>
-      </p:sp>
     </p:spTree>
     <p:extLst>
       <p:ext uri="{BB962C8B-B14F-4D97-AF65-F5344CB8AC3E}">
-        <p14:creationId xmlns:p14="http://schemas.microsoft.com/office/powerpoint/2010/main" val="1024086991"/>
+        <p14:creationId xmlns:p14="http://schemas.microsoft.com/office/powerpoint/2010/main" val="3281447573"/>
       </p:ext>
     </p:extLst>
   </p:cSld>
@@ -508,10 +290,6 @@
           <a:bodyPr/>
           <a:lstStyle/>
           <a:p>
-            <a:r>
-              <a:rPr lang="en-US" dirty="0"/>
-              <a:t/>
-            </a:r>
             <a:endParaRPr lang="en-US" dirty="0"/>
           </a:p>
         </p:txBody>
@@ -534,6 +312,90 @@
             <a:fld id="{F7021451-1387-4CA6-816F-3879F97B5CBC}" type="slidenum">
               <a:rPr lang="en-US"/>
               <a:t>1</a:t>
+            </a:fld>
+            <a:endParaRPr lang="en-US"/>
+          </a:p>
+        </p:txBody>
+      </p:sp>
+    </p:spTree>
+    <p:extLst>
+      <p:ext uri="{BB962C8B-B14F-4D97-AF65-F5344CB8AC3E}">
+        <p14:creationId xmlns:p14="http://schemas.microsoft.com/office/powerpoint/2010/main" val="1024086991"/>
+      </p:ext>
+    </p:extLst>
+  </p:cSld>
+  <p:clrMapOvr>
+    <a:masterClrMapping/>
+  </p:clrMapOvr>
+</p:notes>
+</file>
+
+<file path=ppt/notesSlides/notesSlide10.xml><?xml version="1.0" encoding="utf-8"?>
+<p:notes xmlns:a="http://schemas.openxmlformats.org/drawingml/2006/main" xmlns:r="http://schemas.openxmlformats.org/officeDocument/2006/relationships" xmlns:p="http://schemas.openxmlformats.org/presentationml/2006/main">
+  <p:cSld>
+    <p:spTree>
+      <p:nvGrpSpPr>
+        <p:cNvPr id="1" name=""/>
+        <p:cNvGrpSpPr/>
+        <p:nvPr/>
+      </p:nvGrpSpPr>
+      <p:grpSpPr>
+        <a:xfrm>
+          <a:off x="0" y="0"/>
+          <a:ext cx="0" cy="0"/>
+          <a:chOff x="0" y="0"/>
+          <a:chExt cx="0" cy="0"/>
+        </a:xfrm>
+      </p:grpSpPr>
+      <p:sp>
+        <p:nvSpPr>
+          <p:cNvPr id="2" name="Slide Image Placeholder 1"/>
+          <p:cNvSpPr>
+            <a:spLocks noGrp="1" noRot="1" noChangeAspect="1"/>
+          </p:cNvSpPr>
+          <p:nvPr>
+            <p:ph type="sldImg"/>
+          </p:nvPr>
+        </p:nvSpPr>
+        <p:spPr/>
+      </p:sp>
+      <p:sp>
+        <p:nvSpPr>
+          <p:cNvPr id="3" name="Notes Placeholder 2"/>
+          <p:cNvSpPr>
+            <a:spLocks noGrp="1"/>
+          </p:cNvSpPr>
+          <p:nvPr>
+            <p:ph type="body" idx="1"/>
+          </p:nvPr>
+        </p:nvSpPr>
+        <p:spPr/>
+        <p:txBody>
+          <a:bodyPr/>
+          <a:lstStyle/>
+          <a:p>
+            <a:endParaRPr lang="en-US" dirty="0"/>
+          </a:p>
+        </p:txBody>
+      </p:sp>
+      <p:sp>
+        <p:nvSpPr>
+          <p:cNvPr id="4" name="Slide Number Placeholder 3"/>
+          <p:cNvSpPr>
+            <a:spLocks noGrp="1"/>
+          </p:cNvSpPr>
+          <p:nvPr>
+            <p:ph type="sldNum" sz="quarter" idx="10"/>
+          </p:nvPr>
+        </p:nvSpPr>
+        <p:spPr/>
+        <p:txBody>
+          <a:bodyPr/>
+          <a:lstStyle/>
+          <a:p>
+            <a:fld id="{F7021451-1387-4CA6-816F-3879F97B5CBC}" type="slidenum">
+              <a:rPr lang="en-US"/>
+              <a:t>10</a:t>
             </a:fld>
             <a:endParaRPr lang="en-US"/>
           </a:p>
@@ -596,10 +458,6 @@
           <a:bodyPr/>
           <a:lstStyle/>
           <a:p>
-            <a:r>
-              <a:rPr lang="en-US" dirty="0"/>
-              <a:t/>
-            </a:r>
             <a:endParaRPr lang="en-US" dirty="0"/>
           </a:p>
         </p:txBody>
@@ -684,10 +542,6 @@
           <a:bodyPr/>
           <a:lstStyle/>
           <a:p>
-            <a:r>
-              <a:rPr lang="en-US" dirty="0"/>
-              <a:t/>
-            </a:r>
             <a:endParaRPr lang="en-US" dirty="0"/>
           </a:p>
         </p:txBody>
@@ -772,10 +626,6 @@
           <a:bodyPr/>
           <a:lstStyle/>
           <a:p>
-            <a:r>
-              <a:rPr lang="en-US" dirty="0"/>
-              <a:t/>
-            </a:r>
             <a:endParaRPr lang="en-US" dirty="0"/>
           </a:p>
         </p:txBody>
@@ -860,10 +710,6 @@
           <a:bodyPr/>
           <a:lstStyle/>
           <a:p>
-            <a:r>
-              <a:rPr lang="en-US" dirty="0"/>
-              <a:t/>
-            </a:r>
             <a:endParaRPr lang="en-US" dirty="0"/>
           </a:p>
         </p:txBody>
@@ -948,10 +794,6 @@
           <a:bodyPr/>
           <a:lstStyle/>
           <a:p>
-            <a:r>
-              <a:rPr lang="en-US" dirty="0"/>
-              <a:t/>
-            </a:r>
             <a:endParaRPr lang="en-US" dirty="0"/>
           </a:p>
         </p:txBody>
@@ -1036,10 +878,6 @@
           <a:bodyPr/>
           <a:lstStyle/>
           <a:p>
-            <a:r>
-              <a:rPr lang="en-US" dirty="0"/>
-              <a:t/>
-            </a:r>
             <a:endParaRPr lang="en-US" dirty="0"/>
           </a:p>
         </p:txBody>
@@ -1085,7 +923,13 @@
   <p:cSld>
     <p:spTree>
       <p:nvGrpSpPr>
-        <p:cNvPr id="1" name=""/>
+        <p:cNvPr id="1" name="">
+          <a:extLst>
+            <a:ext uri="{FF2B5EF4-FFF2-40B4-BE49-F238E27FC236}">
+              <a16:creationId xmlns:a16="http://schemas.microsoft.com/office/drawing/2014/main" id="{A84AE39F-B3A5-A73C-A84B-6643226900A3}"/>
+            </a:ext>
+          </a:extLst>
+        </p:cNvPr>
         <p:cNvGrpSpPr/>
         <p:nvPr/>
       </p:nvGrpSpPr>
@@ -1099,7 +943,13 @@
       </p:grpSpPr>
       <p:sp>
         <p:nvSpPr>
-          <p:cNvPr id="2" name="Slide Image Placeholder 1"/>
+          <p:cNvPr id="2" name="Slide Image Placeholder 1">
+            <a:extLst>
+              <a:ext uri="{FF2B5EF4-FFF2-40B4-BE49-F238E27FC236}">
+                <a16:creationId xmlns:a16="http://schemas.microsoft.com/office/drawing/2014/main" id="{DADF9479-7E99-6FB3-6EE1-C5A3C7DC190B}"/>
+              </a:ext>
+            </a:extLst>
+          </p:cNvPr>
           <p:cNvSpPr>
             <a:spLocks noGrp="1" noRot="1" noChangeAspect="1"/>
           </p:cNvSpPr>
@@ -1111,7 +961,13 @@
       </p:sp>
       <p:sp>
         <p:nvSpPr>
-          <p:cNvPr id="3" name="Notes Placeholder 2"/>
+          <p:cNvPr id="3" name="Notes Placeholder 2">
+            <a:extLst>
+              <a:ext uri="{FF2B5EF4-FFF2-40B4-BE49-F238E27FC236}">
+                <a16:creationId xmlns:a16="http://schemas.microsoft.com/office/drawing/2014/main" id="{619546BF-DC4D-1878-50A4-BE4360C095E5}"/>
+              </a:ext>
+            </a:extLst>
+          </p:cNvPr>
           <p:cNvSpPr>
             <a:spLocks noGrp="1"/>
           </p:cNvSpPr>
@@ -1124,17 +980,19 @@
           <a:bodyPr/>
           <a:lstStyle/>
           <a:p>
-            <a:r>
-              <a:rPr lang="en-US" dirty="0"/>
-              <a:t/>
-            </a:r>
             <a:endParaRPr lang="en-US" dirty="0"/>
           </a:p>
         </p:txBody>
       </p:sp>
       <p:sp>
         <p:nvSpPr>
-          <p:cNvPr id="4" name="Slide Number Placeholder 3"/>
+          <p:cNvPr id="4" name="Slide Number Placeholder 3">
+            <a:extLst>
+              <a:ext uri="{FF2B5EF4-FFF2-40B4-BE49-F238E27FC236}">
+                <a16:creationId xmlns:a16="http://schemas.microsoft.com/office/drawing/2014/main" id="{D2883F40-C7AF-C5C6-C087-AE5ED9874B7C}"/>
+              </a:ext>
+            </a:extLst>
+          </p:cNvPr>
           <p:cNvSpPr>
             <a:spLocks noGrp="1"/>
           </p:cNvSpPr>
@@ -1158,7 +1016,7 @@
     </p:spTree>
     <p:extLst>
       <p:ext uri="{BB962C8B-B14F-4D97-AF65-F5344CB8AC3E}">
-        <p14:creationId xmlns:p14="http://schemas.microsoft.com/office/powerpoint/2010/main" val="1024086991"/>
+        <p14:creationId xmlns:p14="http://schemas.microsoft.com/office/powerpoint/2010/main" val="2032806795"/>
       </p:ext>
     </p:extLst>
   </p:cSld>
@@ -1212,10 +1070,6 @@
           <a:bodyPr/>
           <a:lstStyle/>
           <a:p>
-            <a:r>
-              <a:rPr lang="en-US" dirty="0"/>
-              <a:t/>
-            </a:r>
             <a:endParaRPr lang="en-US" dirty="0"/>
           </a:p>
         </p:txBody>
@@ -1289,6 +1143,11 @@
 <file path=ppt/slideMasters/slideMaster1.xml><?xml version="1.0" encoding="utf-8"?>
 <p:sldMaster xmlns:a="http://schemas.openxmlformats.org/drawingml/2006/main" xmlns:r="http://schemas.openxmlformats.org/officeDocument/2006/relationships" xmlns:p="http://schemas.openxmlformats.org/presentationml/2006/main">
   <p:cSld>
+    <p:bg>
+      <p:bgRef idx="1001">
+        <a:schemeClr val="bg1"/>
+      </p:bgRef>
+    </p:bg>
     <p:spTree>
       <p:nvGrpSpPr>
         <p:cNvPr id="1" name=""/>
@@ -1571,6 +1430,7 @@
         <a:solidFill>
           <a:srgbClr val="028090"/>
         </a:solidFill>
+        <a:effectLst/>
       </p:bgPr>
     </p:bg>
     <p:spTree>
@@ -1606,6 +1466,13 @@
           </a:solidFill>
           <a:ln/>
         </p:spPr>
+        <p:txBody>
+          <a:bodyPr/>
+          <a:lstStyle/>
+          <a:p>
+            <a:endParaRPr lang="en-GB"/>
+          </a:p>
+        </p:txBody>
       </p:sp>
       <p:sp>
         <p:nvSpPr>
@@ -1626,6 +1493,13 @@
           </a:solidFill>
           <a:ln/>
         </p:spPr>
+        <p:txBody>
+          <a:bodyPr/>
+          <a:lstStyle/>
+          <a:p>
+            <a:endParaRPr lang="en-GB"/>
+          </a:p>
+        </p:txBody>
       </p:sp>
       <p:sp>
         <p:nvSpPr>
@@ -1648,11 +1522,11 @@
           <a:bodyPr wrap="square" rtlCol="0" anchor="ctr"/>
           <a:lstStyle/>
           <a:p>
-            <a:pPr indent="0" marL="0">
-              <a:buNone/>
-            </a:pPr>
-            <a:r>
-              <a:rPr lang="en-US" sz="1000" spc="400" kern="0" dirty="0">
+            <a:pPr marL="0" indent="0">
+              <a:buNone/>
+            </a:pPr>
+            <a:r>
+              <a:rPr lang="en-US" sz="1000" kern="0" spc="400" dirty="0">
                 <a:solidFill>
                   <a:srgbClr val="A7D8DC"/>
                 </a:solidFill>
@@ -1687,7 +1561,7 @@
           <a:bodyPr wrap="square" rtlCol="0" anchor="ctr"/>
           <a:lstStyle/>
           <a:p>
-            <a:pPr indent="0" marL="0">
+            <a:pPr marL="0" indent="0">
               <a:buNone/>
             </a:pPr>
             <a:r>
@@ -1704,7 +1578,7 @@
             <a:endParaRPr lang="en-US" sz="3600" dirty="0"/>
           </a:p>
           <a:p>
-            <a:pPr indent="0" marL="0">
+            <a:pPr marL="0" indent="0">
               <a:buNone/>
             </a:pPr>
             <a:r>
@@ -1743,7 +1617,7 @@
           <a:bodyPr wrap="square" rtlCol="0" anchor="ctr"/>
           <a:lstStyle/>
           <a:p>
-            <a:pPr indent="0" marL="0">
+            <a:pPr marL="0" indent="0">
               <a:buNone/>
             </a:pPr>
             <a:r>
@@ -1758,6 +1632,200 @@
               <a:t>Day 1 · Session 1 — Introductions &amp; Personality Profiling</a:t>
             </a:r>
             <a:endParaRPr lang="en-US" sz="1600" dirty="0"/>
+          </a:p>
+        </p:txBody>
+      </p:sp>
+    </p:spTree>
+  </p:cSld>
+  <p:clrMapOvr>
+    <a:masterClrMapping/>
+  </p:clrMapOvr>
+</p:sld>
+</file>
+
+<file path=ppt/slides/slide10.xml><?xml version="1.0" encoding="utf-8"?>
+<p:sld xmlns:a="http://schemas.openxmlformats.org/drawingml/2006/main" xmlns:r="http://schemas.openxmlformats.org/officeDocument/2006/relationships" xmlns:p="http://schemas.openxmlformats.org/presentationml/2006/main">
+  <p:cSld name="Slide 9">
+    <p:bg>
+      <p:bgPr>
+        <a:solidFill>
+          <a:srgbClr val="028090"/>
+        </a:solidFill>
+        <a:effectLst/>
+      </p:bgPr>
+    </p:bg>
+    <p:spTree>
+      <p:nvGrpSpPr>
+        <p:cNvPr id="1" name=""/>
+        <p:cNvGrpSpPr/>
+        <p:nvPr/>
+      </p:nvGrpSpPr>
+      <p:grpSpPr>
+        <a:xfrm>
+          <a:off x="0" y="0"/>
+          <a:ext cx="0" cy="0"/>
+          <a:chOff x="0" y="0"/>
+          <a:chExt cx="0" cy="0"/>
+        </a:xfrm>
+      </p:grpSpPr>
+      <p:sp>
+        <p:nvSpPr>
+          <p:cNvPr id="2" name="Shape 0"/>
+          <p:cNvSpPr/>
+          <p:nvPr/>
+        </p:nvSpPr>
+        <p:spPr>
+          <a:xfrm>
+            <a:off x="0" y="0"/>
+            <a:ext cx="109728" cy="5143500"/>
+          </a:xfrm>
+          <a:prstGeom prst="rect">
+            <a:avLst/>
+          </a:prstGeom>
+          <a:solidFill>
+            <a:srgbClr val="EF9F27"/>
+          </a:solidFill>
+          <a:ln/>
+        </p:spPr>
+        <p:txBody>
+          <a:bodyPr/>
+          <a:lstStyle/>
+          <a:p>
+            <a:endParaRPr lang="en-GB"/>
+          </a:p>
+        </p:txBody>
+      </p:sp>
+      <p:sp>
+        <p:nvSpPr>
+          <p:cNvPr id="3" name="Text 1"/>
+          <p:cNvSpPr/>
+          <p:nvPr/>
+        </p:nvSpPr>
+        <p:spPr>
+          <a:xfrm>
+            <a:off x="365760" y="1371600"/>
+            <a:ext cx="8229600" cy="457200"/>
+          </a:xfrm>
+          <a:prstGeom prst="rect">
+            <a:avLst/>
+          </a:prstGeom>
+          <a:noFill/>
+          <a:ln/>
+        </p:spPr>
+        <p:txBody>
+          <a:bodyPr wrap="square" rtlCol="0" anchor="ctr"/>
+          <a:lstStyle/>
+          <a:p>
+            <a:pPr marL="0" indent="0">
+              <a:buNone/>
+            </a:pPr>
+            <a:r>
+              <a:rPr lang="en-US" sz="1400" kern="0" spc="300" dirty="0">
+                <a:solidFill>
+                  <a:srgbClr val="A7D8DC"/>
+                </a:solidFill>
+                <a:latin typeface="Calibri" pitchFamily="34" charset="0"/>
+                <a:ea typeface="Calibri" pitchFamily="34" charset="-122"/>
+                <a:cs typeface="Calibri" pitchFamily="34" charset="-120"/>
+              </a:rPr>
+              <a:t>Up next</a:t>
+            </a:r>
+            <a:endParaRPr lang="en-US" sz="1400" dirty="0"/>
+          </a:p>
+        </p:txBody>
+      </p:sp>
+      <p:sp>
+        <p:nvSpPr>
+          <p:cNvPr id="4" name="Text 2"/>
+          <p:cNvSpPr/>
+          <p:nvPr/>
+        </p:nvSpPr>
+        <p:spPr>
+          <a:xfrm>
+            <a:off x="365760" y="1920240"/>
+            <a:ext cx="8229600" cy="1645920"/>
+          </a:xfrm>
+          <a:prstGeom prst="rect">
+            <a:avLst/>
+          </a:prstGeom>
+          <a:noFill/>
+          <a:ln/>
+        </p:spPr>
+        <p:txBody>
+          <a:bodyPr wrap="square" rtlCol="0" anchor="ctr"/>
+          <a:lstStyle/>
+          <a:p>
+            <a:pPr marL="0" indent="0">
+              <a:buNone/>
+            </a:pPr>
+            <a:r>
+              <a:rPr lang="en-US" sz="3200" b="1" dirty="0">
+                <a:solidFill>
+                  <a:srgbClr val="FFFFFF"/>
+                </a:solidFill>
+                <a:latin typeface="Calibri" pitchFamily="34" charset="0"/>
+                <a:ea typeface="Calibri" pitchFamily="34" charset="-122"/>
+                <a:cs typeface="Calibri" pitchFamily="34" charset="-120"/>
+              </a:rPr>
+              <a:t>Team Building Activity</a:t>
+            </a:r>
+            <a:endParaRPr lang="en-US" sz="3200" dirty="0"/>
+          </a:p>
+          <a:p>
+            <a:pPr marL="0" indent="0">
+              <a:buNone/>
+            </a:pPr>
+            <a:r>
+              <a:rPr lang="en-US" sz="3200" b="1" dirty="0">
+                <a:solidFill>
+                  <a:srgbClr val="FFFFFF"/>
+                </a:solidFill>
+                <a:latin typeface="Calibri" pitchFamily="34" charset="0"/>
+                <a:ea typeface="Calibri" pitchFamily="34" charset="-122"/>
+                <a:cs typeface="Calibri" pitchFamily="34" charset="-120"/>
+              </a:rPr>
+              <a:t>&amp; Team Formation</a:t>
+            </a:r>
+            <a:endParaRPr lang="en-US" sz="3200" dirty="0"/>
+          </a:p>
+        </p:txBody>
+      </p:sp>
+      <p:sp>
+        <p:nvSpPr>
+          <p:cNvPr id="5" name="Text 3"/>
+          <p:cNvSpPr/>
+          <p:nvPr/>
+        </p:nvSpPr>
+        <p:spPr>
+          <a:xfrm>
+            <a:off x="365760" y="3749040"/>
+            <a:ext cx="8229600" cy="457200"/>
+          </a:xfrm>
+          <a:prstGeom prst="rect">
+            <a:avLst/>
+          </a:prstGeom>
+          <a:noFill/>
+          <a:ln/>
+        </p:spPr>
+        <p:txBody>
+          <a:bodyPr wrap="square" rtlCol="0" anchor="ctr"/>
+          <a:lstStyle/>
+          <a:p>
+            <a:pPr marL="0" indent="0">
+              <a:buNone/>
+            </a:pPr>
+            <a:r>
+              <a:rPr lang="en-US" sz="1400" dirty="0">
+                <a:solidFill>
+                  <a:srgbClr val="A7D8DC"/>
+                </a:solidFill>
+                <a:latin typeface="Calibri" pitchFamily="34" charset="0"/>
+                <a:ea typeface="Calibri" pitchFamily="34" charset="-122"/>
+                <a:cs typeface="Calibri" pitchFamily="34" charset="-120"/>
+              </a:rPr>
+              <a:t>Day 1 · Session 2 — This afternoon</a:t>
+            </a:r>
+            <a:endParaRPr lang="en-US" sz="1400" dirty="0"/>
           </a:p>
         </p:txBody>
       </p:sp>
@@ -1777,6 +1845,7 @@
         <a:solidFill>
           <a:srgbClr val="FFFFFF"/>
         </a:solidFill>
+        <a:effectLst/>
       </p:bgPr>
     </p:bg>
     <p:spTree>
@@ -1812,6 +1881,13 @@
           </a:solidFill>
           <a:ln/>
         </p:spPr>
+        <p:txBody>
+          <a:bodyPr/>
+          <a:lstStyle/>
+          <a:p>
+            <a:endParaRPr lang="en-GB"/>
+          </a:p>
+        </p:txBody>
       </p:sp>
       <p:sp>
         <p:nvSpPr>
@@ -1834,11 +1910,11 @@
           <a:bodyPr wrap="square" rtlCol="0" anchor="ctr"/>
           <a:lstStyle/>
           <a:p>
-            <a:pPr indent="0" marL="0">
-              <a:buNone/>
-            </a:pPr>
-            <a:r>
-              <a:rPr lang="en-US" sz="900" spc="300" kern="0" dirty="0">
+            <a:pPr marL="0" indent="0">
+              <a:buNone/>
+            </a:pPr>
+            <a:r>
+              <a:rPr lang="en-US" sz="900" kern="0" spc="300" dirty="0">
                 <a:solidFill>
                   <a:srgbClr val="A7D8DC"/>
                 </a:solidFill>
@@ -1873,7 +1949,7 @@
           <a:bodyPr wrap="square" rtlCol="0" anchor="ctr"/>
           <a:lstStyle/>
           <a:p>
-            <a:pPr indent="0" marL="0">
+            <a:pPr marL="0" indent="0">
               <a:buNone/>
             </a:pPr>
             <a:r>
@@ -1912,7 +1988,7 @@
           <a:bodyPr wrap="square" rtlCol="0" anchor="ctr"/>
           <a:lstStyle/>
           <a:p>
-            <a:pPr indent="0" marL="0">
+            <a:pPr marL="0" indent="0">
               <a:buNone/>
             </a:pPr>
             <a:r>
@@ -1926,9 +2002,6 @@
               </a:rPr>
               <a:t>Financial literacy </a:t>
             </a:r>
-            <a:pPr indent="0" marL="0">
-              <a:buNone/>
-            </a:pPr>
             <a:r>
               <a:rPr lang="en-US" sz="1600" dirty="0">
                 <a:solidFill>
@@ -1963,6 +2036,13 @@
           </a:solidFill>
           <a:ln/>
         </p:spPr>
+        <p:txBody>
+          <a:bodyPr/>
+          <a:lstStyle/>
+          <a:p>
+            <a:endParaRPr lang="en-GB"/>
+          </a:p>
+        </p:txBody>
       </p:sp>
       <p:sp>
         <p:nvSpPr>
@@ -1983,6 +2063,13 @@
           </a:solidFill>
           <a:ln/>
         </p:spPr>
+        <p:txBody>
+          <a:bodyPr/>
+          <a:lstStyle/>
+          <a:p>
+            <a:endParaRPr lang="en-GB"/>
+          </a:p>
+        </p:txBody>
       </p:sp>
       <p:sp>
         <p:nvSpPr>
@@ -2005,7 +2092,7 @@
           <a:bodyPr wrap="square" lIns="0" tIns="0" rIns="0" bIns="0" rtlCol="0" anchor="ctr"/>
           <a:lstStyle/>
           <a:p>
-            <a:pPr indent="0" marL="0">
+            <a:pPr marL="0" indent="0">
               <a:buNone/>
             </a:pPr>
             <a:r>
@@ -2044,7 +2131,7 @@
           <a:bodyPr wrap="square" lIns="0" tIns="0" rIns="0" bIns="0" rtlCol="0" anchor="ctr"/>
           <a:lstStyle/>
           <a:p>
-            <a:pPr indent="0" marL="0">
+            <a:pPr marL="0" indent="0">
               <a:buNone/>
             </a:pPr>
             <a:r>
@@ -2081,6 +2168,13 @@
           </a:solidFill>
           <a:ln/>
         </p:spPr>
+        <p:txBody>
+          <a:bodyPr/>
+          <a:lstStyle/>
+          <a:p>
+            <a:endParaRPr lang="en-GB"/>
+          </a:p>
+        </p:txBody>
       </p:sp>
       <p:sp>
         <p:nvSpPr>
@@ -2101,6 +2195,13 @@
           </a:solidFill>
           <a:ln/>
         </p:spPr>
+        <p:txBody>
+          <a:bodyPr/>
+          <a:lstStyle/>
+          <a:p>
+            <a:endParaRPr lang="en-GB"/>
+          </a:p>
+        </p:txBody>
       </p:sp>
       <p:sp>
         <p:nvSpPr>
@@ -2123,7 +2224,7 @@
           <a:bodyPr wrap="square" lIns="0" tIns="0" rIns="0" bIns="0" rtlCol="0" anchor="ctr"/>
           <a:lstStyle/>
           <a:p>
-            <a:pPr indent="0" marL="0">
+            <a:pPr marL="0" indent="0">
               <a:buNone/>
             </a:pPr>
             <a:r>
@@ -2162,7 +2263,7 @@
           <a:bodyPr wrap="square" lIns="0" tIns="0" rIns="0" bIns="0" rtlCol="0" anchor="ctr"/>
           <a:lstStyle/>
           <a:p>
-            <a:pPr indent="0" marL="0">
+            <a:pPr marL="0" indent="0">
               <a:buNone/>
             </a:pPr>
             <a:r>
@@ -2199,6 +2300,13 @@
           </a:solidFill>
           <a:ln/>
         </p:spPr>
+        <p:txBody>
+          <a:bodyPr/>
+          <a:lstStyle/>
+          <a:p>
+            <a:endParaRPr lang="en-GB"/>
+          </a:p>
+        </p:txBody>
       </p:sp>
       <p:sp>
         <p:nvSpPr>
@@ -2219,6 +2327,13 @@
           </a:solidFill>
           <a:ln/>
         </p:spPr>
+        <p:txBody>
+          <a:bodyPr/>
+          <a:lstStyle/>
+          <a:p>
+            <a:endParaRPr lang="en-GB"/>
+          </a:p>
+        </p:txBody>
       </p:sp>
       <p:sp>
         <p:nvSpPr>
@@ -2241,7 +2356,7 @@
           <a:bodyPr wrap="square" lIns="0" tIns="0" rIns="0" bIns="0" rtlCol="0" anchor="ctr"/>
           <a:lstStyle/>
           <a:p>
-            <a:pPr indent="0" marL="0">
+            <a:pPr marL="0" indent="0">
               <a:buNone/>
             </a:pPr>
             <a:r>
@@ -2280,7 +2395,7 @@
           <a:bodyPr wrap="square" lIns="0" tIns="0" rIns="0" bIns="0" rtlCol="0" anchor="ctr"/>
           <a:lstStyle/>
           <a:p>
-            <a:pPr indent="0" marL="0">
+            <a:pPr marL="0" indent="0">
               <a:buNone/>
             </a:pPr>
             <a:r>
@@ -2314,6 +2429,7 @@
         <a:solidFill>
           <a:srgbClr val="FFFFFF"/>
         </a:solidFill>
+        <a:effectLst/>
       </p:bgPr>
     </p:bg>
     <p:spTree>
@@ -2349,6 +2465,13 @@
           </a:solidFill>
           <a:ln/>
         </p:spPr>
+        <p:txBody>
+          <a:bodyPr/>
+          <a:lstStyle/>
+          <a:p>
+            <a:endParaRPr lang="en-GB"/>
+          </a:p>
+        </p:txBody>
       </p:sp>
       <p:sp>
         <p:nvSpPr>
@@ -2371,11 +2494,11 @@
           <a:bodyPr wrap="square" rtlCol="0" anchor="ctr"/>
           <a:lstStyle/>
           <a:p>
-            <a:pPr indent="0" marL="0">
-              <a:buNone/>
-            </a:pPr>
-            <a:r>
-              <a:rPr lang="en-US" sz="900" spc="300" kern="0" dirty="0">
+            <a:pPr marL="0" indent="0">
+              <a:buNone/>
+            </a:pPr>
+            <a:r>
+              <a:rPr lang="en-US" sz="900" kern="0" spc="300" dirty="0">
                 <a:solidFill>
                   <a:srgbClr val="A7D8DC"/>
                 </a:solidFill>
@@ -2410,7 +2533,7 @@
           <a:bodyPr wrap="square" rtlCol="0" anchor="ctr"/>
           <a:lstStyle/>
           <a:p>
-            <a:pPr indent="0" marL="0">
+            <a:pPr marL="0" indent="0">
               <a:buNone/>
             </a:pPr>
             <a:r>
@@ -2447,6 +2570,13 @@
           </a:solidFill>
           <a:ln/>
         </p:spPr>
+        <p:txBody>
+          <a:bodyPr/>
+          <a:lstStyle/>
+          <a:p>
+            <a:endParaRPr lang="en-GB"/>
+          </a:p>
+        </p:txBody>
       </p:sp>
       <p:sp>
         <p:nvSpPr>
@@ -2469,7 +2599,7 @@
           <a:bodyPr wrap="square" lIns="0" tIns="0" rIns="0" bIns="0" rtlCol="0" anchor="ctr"/>
           <a:lstStyle/>
           <a:p>
-            <a:pPr indent="0" marL="0">
+            <a:pPr marL="0" indent="0">
               <a:buNone/>
             </a:pPr>
             <a:r>
@@ -2508,7 +2638,7 @@
           <a:bodyPr wrap="square" lIns="0" tIns="0" rIns="0" bIns="0" rtlCol="0" anchor="ctr"/>
           <a:lstStyle/>
           <a:p>
-            <a:pPr indent="0" marL="0">
+            <a:pPr marL="0" indent="0">
               <a:buNone/>
             </a:pPr>
             <a:r>
@@ -2547,7 +2677,7 @@
           <a:bodyPr wrap="square" lIns="0" tIns="0" rIns="0" bIns="0" rtlCol="0" anchor="ctr"/>
           <a:lstStyle/>
           <a:p>
-            <a:pPr indent="0" marL="0">
+            <a:pPr marL="0" indent="0">
               <a:buNone/>
             </a:pPr>
             <a:r>
@@ -2584,6 +2714,13 @@
           </a:solidFill>
           <a:ln/>
         </p:spPr>
+        <p:txBody>
+          <a:bodyPr/>
+          <a:lstStyle/>
+          <a:p>
+            <a:endParaRPr lang="en-GB"/>
+          </a:p>
+        </p:txBody>
       </p:sp>
       <p:sp>
         <p:nvSpPr>
@@ -2606,7 +2743,7 @@
           <a:bodyPr wrap="square" lIns="0" tIns="0" rIns="0" bIns="0" rtlCol="0" anchor="ctr"/>
           <a:lstStyle/>
           <a:p>
-            <a:pPr indent="0" marL="0">
+            <a:pPr marL="0" indent="0">
               <a:buNone/>
             </a:pPr>
             <a:r>
@@ -2645,7 +2782,7 @@
           <a:bodyPr wrap="square" lIns="0" tIns="0" rIns="0" bIns="0" rtlCol="0" anchor="ctr"/>
           <a:lstStyle/>
           <a:p>
-            <a:pPr indent="0" marL="0">
+            <a:pPr marL="0" indent="0">
               <a:buNone/>
             </a:pPr>
             <a:r>
@@ -2684,7 +2821,7 @@
           <a:bodyPr wrap="square" lIns="0" tIns="0" rIns="0" bIns="0" rtlCol="0" anchor="ctr"/>
           <a:lstStyle/>
           <a:p>
-            <a:pPr indent="0" marL="0">
+            <a:pPr marL="0" indent="0">
               <a:buNone/>
             </a:pPr>
             <a:r>
@@ -2721,6 +2858,13 @@
           </a:solidFill>
           <a:ln/>
         </p:spPr>
+        <p:txBody>
+          <a:bodyPr/>
+          <a:lstStyle/>
+          <a:p>
+            <a:endParaRPr lang="en-GB"/>
+          </a:p>
+        </p:txBody>
       </p:sp>
       <p:sp>
         <p:nvSpPr>
@@ -2743,7 +2887,7 @@
           <a:bodyPr wrap="square" lIns="0" tIns="0" rIns="0" bIns="0" rtlCol="0" anchor="ctr"/>
           <a:lstStyle/>
           <a:p>
-            <a:pPr indent="0" marL="0">
+            <a:pPr marL="0" indent="0">
               <a:buNone/>
             </a:pPr>
             <a:r>
@@ -2782,7 +2926,7 @@
           <a:bodyPr wrap="square" lIns="0" tIns="0" rIns="0" bIns="0" rtlCol="0" anchor="ctr"/>
           <a:lstStyle/>
           <a:p>
-            <a:pPr indent="0" marL="0">
+            <a:pPr marL="0" indent="0">
               <a:buNone/>
             </a:pPr>
             <a:r>
@@ -2821,7 +2965,7 @@
           <a:bodyPr wrap="square" lIns="0" tIns="0" rIns="0" bIns="0" rtlCol="0" anchor="ctr"/>
           <a:lstStyle/>
           <a:p>
-            <a:pPr indent="0" marL="0">
+            <a:pPr marL="0" indent="0">
               <a:buNone/>
             </a:pPr>
             <a:r>
@@ -2858,6 +3002,13 @@
           </a:solidFill>
           <a:ln/>
         </p:spPr>
+        <p:txBody>
+          <a:bodyPr/>
+          <a:lstStyle/>
+          <a:p>
+            <a:endParaRPr lang="en-GB"/>
+          </a:p>
+        </p:txBody>
       </p:sp>
       <p:sp>
         <p:nvSpPr>
@@ -2880,7 +3031,7 @@
           <a:bodyPr wrap="square" lIns="0" tIns="0" rIns="0" bIns="0" rtlCol="0" anchor="ctr"/>
           <a:lstStyle/>
           <a:p>
-            <a:pPr indent="0" marL="0">
+            <a:pPr marL="0" indent="0">
               <a:buNone/>
             </a:pPr>
             <a:r>
@@ -2919,7 +3070,7 @@
           <a:bodyPr wrap="square" lIns="0" tIns="0" rIns="0" bIns="0" rtlCol="0" anchor="ctr"/>
           <a:lstStyle/>
           <a:p>
-            <a:pPr indent="0" marL="0">
+            <a:pPr marL="0" indent="0">
               <a:buNone/>
             </a:pPr>
             <a:r>
@@ -2958,7 +3109,7 @@
           <a:bodyPr wrap="square" lIns="0" tIns="0" rIns="0" bIns="0" rtlCol="0" anchor="ctr"/>
           <a:lstStyle/>
           <a:p>
-            <a:pPr indent="0" marL="0">
+            <a:pPr marL="0" indent="0">
               <a:buNone/>
             </a:pPr>
             <a:r>
@@ -2995,6 +3146,13 @@
           </a:solidFill>
           <a:ln/>
         </p:spPr>
+        <p:txBody>
+          <a:bodyPr/>
+          <a:lstStyle/>
+          <a:p>
+            <a:endParaRPr lang="en-GB"/>
+          </a:p>
+        </p:txBody>
       </p:sp>
       <p:sp>
         <p:nvSpPr>
@@ -3017,7 +3175,7 @@
           <a:bodyPr wrap="square" lIns="0" tIns="0" rIns="0" bIns="0" rtlCol="0" anchor="ctr"/>
           <a:lstStyle/>
           <a:p>
-            <a:pPr indent="0" marL="0">
+            <a:pPr marL="0" indent="0">
               <a:buNone/>
             </a:pPr>
             <a:r>
@@ -3056,7 +3214,7 @@
           <a:bodyPr wrap="square" lIns="0" tIns="0" rIns="0" bIns="0" rtlCol="0" anchor="ctr"/>
           <a:lstStyle/>
           <a:p>
-            <a:pPr indent="0" marL="0">
+            <a:pPr marL="0" indent="0">
               <a:buNone/>
             </a:pPr>
             <a:r>
@@ -3095,7 +3253,7 @@
           <a:bodyPr wrap="square" lIns="0" tIns="0" rIns="0" bIns="0" rtlCol="0" anchor="ctr"/>
           <a:lstStyle/>
           <a:p>
-            <a:pPr indent="0" marL="0">
+            <a:pPr marL="0" indent="0">
               <a:buNone/>
             </a:pPr>
             <a:r>
@@ -3129,6 +3287,7 @@
         <a:solidFill>
           <a:srgbClr val="FFFFFF"/>
         </a:solidFill>
+        <a:effectLst/>
       </p:bgPr>
     </p:bg>
     <p:spTree>
@@ -3164,6 +3323,13 @@
           </a:solidFill>
           <a:ln/>
         </p:spPr>
+        <p:txBody>
+          <a:bodyPr/>
+          <a:lstStyle/>
+          <a:p>
+            <a:endParaRPr lang="en-GB"/>
+          </a:p>
+        </p:txBody>
       </p:sp>
       <p:sp>
         <p:nvSpPr>
@@ -3186,11 +3352,11 @@
           <a:bodyPr wrap="square" rtlCol="0" anchor="ctr"/>
           <a:lstStyle/>
           <a:p>
-            <a:pPr indent="0" marL="0">
-              <a:buNone/>
-            </a:pPr>
-            <a:r>
-              <a:rPr lang="en-US" sz="900" spc="300" kern="0" dirty="0">
+            <a:pPr marL="0" indent="0">
+              <a:buNone/>
+            </a:pPr>
+            <a:r>
+              <a:rPr lang="en-US" sz="900" kern="0" spc="300" dirty="0">
                 <a:solidFill>
                   <a:srgbClr val="A7D8DC"/>
                 </a:solidFill>
@@ -3225,7 +3391,7 @@
           <a:bodyPr wrap="square" rtlCol="0" anchor="ctr"/>
           <a:lstStyle/>
           <a:p>
-            <a:pPr indent="0" marL="0">
+            <a:pPr marL="0" indent="0">
               <a:buNone/>
             </a:pPr>
             <a:r>
@@ -3264,7 +3430,7 @@
           <a:bodyPr wrap="square" rtlCol="0" anchor="ctr"/>
           <a:lstStyle/>
           <a:p>
-            <a:pPr indent="0" marL="0">
+            <a:pPr marL="0" indent="0">
               <a:buNone/>
             </a:pPr>
             <a:r>
@@ -3301,6 +3467,13 @@
           </a:solidFill>
           <a:ln/>
         </p:spPr>
+        <p:txBody>
+          <a:bodyPr/>
+          <a:lstStyle/>
+          <a:p>
+            <a:endParaRPr lang="en-GB"/>
+          </a:p>
+        </p:txBody>
       </p:sp>
       <p:sp>
         <p:nvSpPr>
@@ -3323,7 +3496,7 @@
           <a:bodyPr wrap="square" lIns="0" tIns="0" rIns="0" bIns="0" rtlCol="0" anchor="ctr"/>
           <a:lstStyle/>
           <a:p>
-            <a:pPr indent="0" marL="0">
+            <a:pPr marL="0" indent="0">
               <a:buNone/>
             </a:pPr>
             <a:r>
@@ -3362,7 +3535,7 @@
           <a:bodyPr wrap="square" rtlCol="0" anchor="ctr"/>
           <a:lstStyle/>
           <a:p>
-            <a:pPr indent="0" marL="0">
+            <a:pPr marL="0" indent="0">
               <a:buNone/>
             </a:pPr>
             <a:r>
@@ -3399,6 +3572,13 @@
           </a:solidFill>
           <a:ln/>
         </p:spPr>
+        <p:txBody>
+          <a:bodyPr/>
+          <a:lstStyle/>
+          <a:p>
+            <a:endParaRPr lang="en-GB"/>
+          </a:p>
+        </p:txBody>
       </p:sp>
       <p:sp>
         <p:nvSpPr>
@@ -3421,7 +3601,7 @@
           <a:bodyPr wrap="square" lIns="0" tIns="0" rIns="0" bIns="0" rtlCol="0" anchor="ctr"/>
           <a:lstStyle/>
           <a:p>
-            <a:pPr indent="0" marL="0">
+            <a:pPr marL="0" indent="0">
               <a:buNone/>
             </a:pPr>
             <a:r>
@@ -3460,7 +3640,7 @@
           <a:bodyPr wrap="square" rtlCol="0" anchor="ctr"/>
           <a:lstStyle/>
           <a:p>
-            <a:pPr indent="0" marL="0">
+            <a:pPr marL="0" indent="0">
               <a:buNone/>
             </a:pPr>
             <a:r>
@@ -3497,6 +3677,13 @@
           </a:solidFill>
           <a:ln/>
         </p:spPr>
+        <p:txBody>
+          <a:bodyPr/>
+          <a:lstStyle/>
+          <a:p>
+            <a:endParaRPr lang="en-GB"/>
+          </a:p>
+        </p:txBody>
       </p:sp>
       <p:sp>
         <p:nvSpPr>
@@ -3519,7 +3706,7 @@
           <a:bodyPr wrap="square" lIns="0" tIns="0" rIns="0" bIns="0" rtlCol="0" anchor="ctr"/>
           <a:lstStyle/>
           <a:p>
-            <a:pPr indent="0" marL="0">
+            <a:pPr marL="0" indent="0">
               <a:buNone/>
             </a:pPr>
             <a:r>
@@ -3558,7 +3745,7 @@
           <a:bodyPr wrap="square" rtlCol="0" anchor="ctr"/>
           <a:lstStyle/>
           <a:p>
-            <a:pPr indent="0" marL="0">
+            <a:pPr marL="0" indent="0">
               <a:buNone/>
             </a:pPr>
             <a:r>
@@ -3595,6 +3782,13 @@
           </a:solidFill>
           <a:ln/>
         </p:spPr>
+        <p:txBody>
+          <a:bodyPr/>
+          <a:lstStyle/>
+          <a:p>
+            <a:endParaRPr lang="en-GB"/>
+          </a:p>
+        </p:txBody>
       </p:sp>
       <p:sp>
         <p:nvSpPr>
@@ -3617,7 +3811,7 @@
           <a:bodyPr wrap="square" lIns="0" tIns="0" rIns="0" bIns="0" rtlCol="0" anchor="ctr"/>
           <a:lstStyle/>
           <a:p>
-            <a:pPr indent="0" marL="0">
+            <a:pPr marL="0" indent="0">
               <a:buNone/>
             </a:pPr>
             <a:r>
@@ -3656,7 +3850,7 @@
           <a:bodyPr wrap="square" rtlCol="0" anchor="ctr"/>
           <a:lstStyle/>
           <a:p>
-            <a:pPr indent="0" marL="0">
+            <a:pPr marL="0" indent="0">
               <a:buNone/>
             </a:pPr>
             <a:r>
@@ -3690,6 +3884,7 @@
         <a:solidFill>
           <a:srgbClr val="FFFFFF"/>
         </a:solidFill>
+        <a:effectLst/>
       </p:bgPr>
     </p:bg>
     <p:spTree>
@@ -3725,6 +3920,13 @@
           </a:solidFill>
           <a:ln/>
         </p:spPr>
+        <p:txBody>
+          <a:bodyPr/>
+          <a:lstStyle/>
+          <a:p>
+            <a:endParaRPr lang="en-GB"/>
+          </a:p>
+        </p:txBody>
       </p:sp>
       <p:sp>
         <p:nvSpPr>
@@ -3747,11 +3949,11 @@
           <a:bodyPr wrap="square" rtlCol="0" anchor="ctr"/>
           <a:lstStyle/>
           <a:p>
-            <a:pPr indent="0" marL="0">
-              <a:buNone/>
-            </a:pPr>
-            <a:r>
-              <a:rPr lang="en-US" sz="900" spc="300" kern="0" dirty="0">
+            <a:pPr marL="0" indent="0">
+              <a:buNone/>
+            </a:pPr>
+            <a:r>
+              <a:rPr lang="en-US" sz="900" kern="0" spc="300" dirty="0">
                 <a:solidFill>
                   <a:srgbClr val="A7D8DC"/>
                 </a:solidFill>
@@ -3786,7 +3988,7 @@
           <a:bodyPr wrap="square" rtlCol="0" anchor="ctr"/>
           <a:lstStyle/>
           <a:p>
-            <a:pPr indent="0" marL="0">
+            <a:pPr marL="0" indent="0">
               <a:buNone/>
             </a:pPr>
             <a:r>
@@ -3825,7 +4027,7 @@
           <a:bodyPr wrap="square" rtlCol="0" anchor="ctr"/>
           <a:lstStyle/>
           <a:p>
-            <a:pPr indent="0" marL="0">
+            <a:pPr marL="0" indent="0">
               <a:buNone/>
             </a:pPr>
             <a:r>
@@ -3862,6 +4064,13 @@
           </a:solidFill>
           <a:ln/>
         </p:spPr>
+        <p:txBody>
+          <a:bodyPr/>
+          <a:lstStyle/>
+          <a:p>
+            <a:endParaRPr lang="en-GB"/>
+          </a:p>
+        </p:txBody>
       </p:sp>
       <p:sp>
         <p:nvSpPr>
@@ -3882,6 +4091,13 @@
           </a:solidFill>
           <a:ln/>
         </p:spPr>
+        <p:txBody>
+          <a:bodyPr/>
+          <a:lstStyle/>
+          <a:p>
+            <a:endParaRPr lang="en-GB"/>
+          </a:p>
+        </p:txBody>
       </p:sp>
       <p:sp>
         <p:nvSpPr>
@@ -3904,7 +4120,7 @@
           <a:bodyPr wrap="square" lIns="0" tIns="0" rIns="0" bIns="0" rtlCol="0" anchor="ctr"/>
           <a:lstStyle/>
           <a:p>
-            <a:pPr algn="ctr" indent="0" marL="0">
+            <a:pPr marL="0" indent="0" algn="ctr">
               <a:buNone/>
             </a:pPr>
             <a:r>
@@ -3943,7 +4159,7 @@
           <a:bodyPr wrap="square" lIns="0" tIns="0" rIns="0" bIns="0" rtlCol="0" anchor="ctr"/>
           <a:lstStyle/>
           <a:p>
-            <a:pPr indent="0" marL="0">
+            <a:pPr marL="0" indent="0">
               <a:buNone/>
             </a:pPr>
             <a:r>
@@ -3982,7 +4198,7 @@
           <a:bodyPr wrap="square" lIns="0" tIns="0" rIns="0" bIns="0" rtlCol="0" anchor="ctr"/>
           <a:lstStyle/>
           <a:p>
-            <a:pPr indent="0" marL="0">
+            <a:pPr marL="0" indent="0">
               <a:buNone/>
             </a:pPr>
             <a:r>
@@ -4019,6 +4235,13 @@
           </a:solidFill>
           <a:ln/>
         </p:spPr>
+        <p:txBody>
+          <a:bodyPr/>
+          <a:lstStyle/>
+          <a:p>
+            <a:endParaRPr lang="en-GB"/>
+          </a:p>
+        </p:txBody>
       </p:sp>
       <p:sp>
         <p:nvSpPr>
@@ -4039,6 +4262,13 @@
           </a:solidFill>
           <a:ln/>
         </p:spPr>
+        <p:txBody>
+          <a:bodyPr/>
+          <a:lstStyle/>
+          <a:p>
+            <a:endParaRPr lang="en-GB"/>
+          </a:p>
+        </p:txBody>
       </p:sp>
       <p:sp>
         <p:nvSpPr>
@@ -4061,7 +4291,7 @@
           <a:bodyPr wrap="square" lIns="0" tIns="0" rIns="0" bIns="0" rtlCol="0" anchor="ctr"/>
           <a:lstStyle/>
           <a:p>
-            <a:pPr algn="ctr" indent="0" marL="0">
+            <a:pPr marL="0" indent="0" algn="ctr">
               <a:buNone/>
             </a:pPr>
             <a:r>
@@ -4100,7 +4330,7 @@
           <a:bodyPr wrap="square" lIns="0" tIns="0" rIns="0" bIns="0" rtlCol="0" anchor="ctr"/>
           <a:lstStyle/>
           <a:p>
-            <a:pPr indent="0" marL="0">
+            <a:pPr marL="0" indent="0">
               <a:buNone/>
             </a:pPr>
             <a:r>
@@ -4139,7 +4369,7 @@
           <a:bodyPr wrap="square" lIns="0" tIns="0" rIns="0" bIns="0" rtlCol="0" anchor="ctr"/>
           <a:lstStyle/>
           <a:p>
-            <a:pPr indent="0" marL="0">
+            <a:pPr marL="0" indent="0">
               <a:buNone/>
             </a:pPr>
             <a:r>
@@ -4176,6 +4406,13 @@
           </a:solidFill>
           <a:ln/>
         </p:spPr>
+        <p:txBody>
+          <a:bodyPr/>
+          <a:lstStyle/>
+          <a:p>
+            <a:endParaRPr lang="en-GB"/>
+          </a:p>
+        </p:txBody>
       </p:sp>
       <p:sp>
         <p:nvSpPr>
@@ -4196,6 +4433,13 @@
           </a:solidFill>
           <a:ln/>
         </p:spPr>
+        <p:txBody>
+          <a:bodyPr/>
+          <a:lstStyle/>
+          <a:p>
+            <a:endParaRPr lang="en-GB"/>
+          </a:p>
+        </p:txBody>
       </p:sp>
       <p:sp>
         <p:nvSpPr>
@@ -4218,7 +4462,7 @@
           <a:bodyPr wrap="square" lIns="0" tIns="0" rIns="0" bIns="0" rtlCol="0" anchor="ctr"/>
           <a:lstStyle/>
           <a:p>
-            <a:pPr algn="ctr" indent="0" marL="0">
+            <a:pPr marL="0" indent="0" algn="ctr">
               <a:buNone/>
             </a:pPr>
             <a:r>
@@ -4257,7 +4501,7 @@
           <a:bodyPr wrap="square" lIns="0" tIns="0" rIns="0" bIns="0" rtlCol="0" anchor="ctr"/>
           <a:lstStyle/>
           <a:p>
-            <a:pPr indent="0" marL="0">
+            <a:pPr marL="0" indent="0">
               <a:buNone/>
             </a:pPr>
             <a:r>
@@ -4296,7 +4540,7 @@
           <a:bodyPr wrap="square" lIns="0" tIns="0" rIns="0" bIns="0" rtlCol="0" anchor="ctr"/>
           <a:lstStyle/>
           <a:p>
-            <a:pPr indent="0" marL="0">
+            <a:pPr marL="0" indent="0">
               <a:buNone/>
             </a:pPr>
             <a:r>
@@ -4333,6 +4577,13 @@
           </a:solidFill>
           <a:ln/>
         </p:spPr>
+        <p:txBody>
+          <a:bodyPr/>
+          <a:lstStyle/>
+          <a:p>
+            <a:endParaRPr lang="en-GB"/>
+          </a:p>
+        </p:txBody>
       </p:sp>
       <p:sp>
         <p:nvSpPr>
@@ -4353,6 +4604,13 @@
           </a:solidFill>
           <a:ln/>
         </p:spPr>
+        <p:txBody>
+          <a:bodyPr/>
+          <a:lstStyle/>
+          <a:p>
+            <a:endParaRPr lang="en-GB"/>
+          </a:p>
+        </p:txBody>
       </p:sp>
       <p:sp>
         <p:nvSpPr>
@@ -4375,7 +4633,7 @@
           <a:bodyPr wrap="square" lIns="0" tIns="0" rIns="0" bIns="0" rtlCol="0" anchor="ctr"/>
           <a:lstStyle/>
           <a:p>
-            <a:pPr algn="ctr" indent="0" marL="0">
+            <a:pPr marL="0" indent="0" algn="ctr">
               <a:buNone/>
             </a:pPr>
             <a:r>
@@ -4414,7 +4672,7 @@
           <a:bodyPr wrap="square" lIns="0" tIns="0" rIns="0" bIns="0" rtlCol="0" anchor="ctr"/>
           <a:lstStyle/>
           <a:p>
-            <a:pPr indent="0" marL="0">
+            <a:pPr marL="0" indent="0">
               <a:buNone/>
             </a:pPr>
             <a:r>
@@ -4453,7 +4711,7 @@
           <a:bodyPr wrap="square" lIns="0" tIns="0" rIns="0" bIns="0" rtlCol="0" anchor="ctr"/>
           <a:lstStyle/>
           <a:p>
-            <a:pPr indent="0" marL="0">
+            <a:pPr marL="0" indent="0">
               <a:buNone/>
             </a:pPr>
             <a:r>
@@ -4487,6 +4745,7 @@
         <a:solidFill>
           <a:srgbClr val="FFFFFF"/>
         </a:solidFill>
+        <a:effectLst/>
       </p:bgPr>
     </p:bg>
     <p:spTree>
@@ -4522,6 +4781,13 @@
           </a:solidFill>
           <a:ln/>
         </p:spPr>
+        <p:txBody>
+          <a:bodyPr/>
+          <a:lstStyle/>
+          <a:p>
+            <a:endParaRPr lang="en-GB"/>
+          </a:p>
+        </p:txBody>
       </p:sp>
       <p:sp>
         <p:nvSpPr>
@@ -4544,11 +4810,11 @@
           <a:bodyPr wrap="square" rtlCol="0" anchor="ctr"/>
           <a:lstStyle/>
           <a:p>
-            <a:pPr indent="0" marL="0">
-              <a:buNone/>
-            </a:pPr>
-            <a:r>
-              <a:rPr lang="en-US" sz="900" spc="300" kern="0" dirty="0">
+            <a:pPr marL="0" indent="0">
+              <a:buNone/>
+            </a:pPr>
+            <a:r>
+              <a:rPr lang="en-US" sz="900" kern="0" spc="300" dirty="0">
                 <a:solidFill>
                   <a:srgbClr val="A7D8DC"/>
                 </a:solidFill>
@@ -4583,7 +4849,7 @@
           <a:bodyPr wrap="square" rtlCol="0" anchor="ctr"/>
           <a:lstStyle/>
           <a:p>
-            <a:pPr indent="0" marL="0">
+            <a:pPr marL="0" indent="0">
               <a:buNone/>
             </a:pPr>
             <a:r>
@@ -4622,7 +4888,7 @@
           <a:bodyPr wrap="square" rtlCol="0" anchor="ctr"/>
           <a:lstStyle/>
           <a:p>
-            <a:pPr indent="0" marL="0">
+            <a:pPr marL="0" indent="0">
               <a:buNone/>
             </a:pPr>
             <a:r>
@@ -4659,6 +4925,13 @@
           </a:solidFill>
           <a:ln/>
         </p:spPr>
+        <p:txBody>
+          <a:bodyPr/>
+          <a:lstStyle/>
+          <a:p>
+            <a:endParaRPr lang="en-GB"/>
+          </a:p>
+        </p:txBody>
       </p:sp>
       <p:sp>
         <p:nvSpPr>
@@ -4681,7 +4954,7 @@
           <a:bodyPr wrap="square" lIns="0" tIns="0" rIns="0" bIns="0" rtlCol="0" anchor="ctr"/>
           <a:lstStyle/>
           <a:p>
-            <a:pPr indent="0" marL="0">
+            <a:pPr marL="0" indent="0">
               <a:buNone/>
             </a:pPr>
             <a:r>
@@ -4720,7 +4993,7 @@
           <a:bodyPr wrap="square" lIns="0" tIns="0" rIns="0" bIns="0" rtlCol="0" anchor="ctr"/>
           <a:lstStyle/>
           <a:p>
-            <a:pPr indent="0" marL="0">
+            <a:pPr marL="0" indent="0">
               <a:buNone/>
             </a:pPr>
             <a:r>
@@ -4757,6 +5030,13 @@
           </a:solidFill>
           <a:ln/>
         </p:spPr>
+        <p:txBody>
+          <a:bodyPr/>
+          <a:lstStyle/>
+          <a:p>
+            <a:endParaRPr lang="en-GB"/>
+          </a:p>
+        </p:txBody>
       </p:sp>
       <p:sp>
         <p:nvSpPr>
@@ -4779,7 +5059,7 @@
           <a:bodyPr wrap="square" lIns="0" tIns="0" rIns="0" bIns="0" rtlCol="0" anchor="ctr"/>
           <a:lstStyle/>
           <a:p>
-            <a:pPr indent="0" marL="0">
+            <a:pPr marL="0" indent="0">
               <a:buNone/>
             </a:pPr>
             <a:r>
@@ -4818,7 +5098,7 @@
           <a:bodyPr wrap="square" lIns="0" tIns="0" rIns="0" bIns="0" rtlCol="0" anchor="ctr"/>
           <a:lstStyle/>
           <a:p>
-            <a:pPr indent="0" marL="0">
+            <a:pPr marL="0" indent="0">
               <a:buNone/>
             </a:pPr>
             <a:r>
@@ -4855,6 +5135,13 @@
           </a:solidFill>
           <a:ln/>
         </p:spPr>
+        <p:txBody>
+          <a:bodyPr/>
+          <a:lstStyle/>
+          <a:p>
+            <a:endParaRPr lang="en-GB"/>
+          </a:p>
+        </p:txBody>
       </p:sp>
       <p:sp>
         <p:nvSpPr>
@@ -4877,7 +5164,7 @@
           <a:bodyPr wrap="square" lIns="0" tIns="0" rIns="0" bIns="0" rtlCol="0" anchor="ctr"/>
           <a:lstStyle/>
           <a:p>
-            <a:pPr indent="0" marL="0">
+            <a:pPr marL="0" indent="0">
               <a:buNone/>
             </a:pPr>
             <a:r>
@@ -4916,7 +5203,7 @@
           <a:bodyPr wrap="square" lIns="0" tIns="0" rIns="0" bIns="0" rtlCol="0" anchor="ctr"/>
           <a:lstStyle/>
           <a:p>
-            <a:pPr indent="0" marL="0">
+            <a:pPr marL="0" indent="0">
               <a:buNone/>
             </a:pPr>
             <a:r>
@@ -4953,6 +5240,13 @@
           </a:solidFill>
           <a:ln/>
         </p:spPr>
+        <p:txBody>
+          <a:bodyPr/>
+          <a:lstStyle/>
+          <a:p>
+            <a:endParaRPr lang="en-GB"/>
+          </a:p>
+        </p:txBody>
       </p:sp>
       <p:sp>
         <p:nvSpPr>
@@ -4975,7 +5269,7 @@
           <a:bodyPr wrap="square" lIns="0" tIns="0" rIns="0" bIns="0" rtlCol="0" anchor="ctr"/>
           <a:lstStyle/>
           <a:p>
-            <a:pPr indent="0" marL="0">
+            <a:pPr marL="0" indent="0">
               <a:buNone/>
             </a:pPr>
             <a:r>
@@ -5014,7 +5308,7 @@
           <a:bodyPr wrap="square" lIns="0" tIns="0" rIns="0" bIns="0" rtlCol="0" anchor="ctr"/>
           <a:lstStyle/>
           <a:p>
-            <a:pPr indent="0" marL="0">
+            <a:pPr marL="0" indent="0">
               <a:buNone/>
             </a:pPr>
             <a:r>
@@ -5051,6 +5345,13 @@
           </a:solidFill>
           <a:ln/>
         </p:spPr>
+        <p:txBody>
+          <a:bodyPr/>
+          <a:lstStyle/>
+          <a:p>
+            <a:endParaRPr lang="en-GB"/>
+          </a:p>
+        </p:txBody>
       </p:sp>
       <p:sp>
         <p:nvSpPr>
@@ -5073,7 +5374,7 @@
           <a:bodyPr wrap="square" rtlCol="0" anchor="ctr"/>
           <a:lstStyle/>
           <a:p>
-            <a:pPr algn="ctr" indent="0" marL="0">
+            <a:pPr marL="0" indent="0" algn="ctr">
               <a:buNone/>
             </a:pPr>
             <a:r>
@@ -5107,6 +5408,7 @@
         <a:solidFill>
           <a:srgbClr val="FFFFFF"/>
         </a:solidFill>
+        <a:effectLst/>
       </p:bgPr>
     </p:bg>
     <p:spTree>
@@ -5142,6 +5444,13 @@
           </a:solidFill>
           <a:ln/>
         </p:spPr>
+        <p:txBody>
+          <a:bodyPr/>
+          <a:lstStyle/>
+          <a:p>
+            <a:endParaRPr lang="en-GB"/>
+          </a:p>
+        </p:txBody>
       </p:sp>
       <p:sp>
         <p:nvSpPr>
@@ -5164,11 +5473,11 @@
           <a:bodyPr wrap="square" rtlCol="0" anchor="ctr"/>
           <a:lstStyle/>
           <a:p>
-            <a:pPr indent="0" marL="0">
-              <a:buNone/>
-            </a:pPr>
-            <a:r>
-              <a:rPr lang="en-US" sz="900" spc="300" kern="0" dirty="0">
+            <a:pPr marL="0" indent="0">
+              <a:buNone/>
+            </a:pPr>
+            <a:r>
+              <a:rPr lang="en-US" sz="900" kern="0" spc="300" dirty="0">
                 <a:solidFill>
                   <a:srgbClr val="A7D8DC"/>
                 </a:solidFill>
@@ -5203,7 +5512,7 @@
           <a:bodyPr wrap="square" rtlCol="0" anchor="ctr"/>
           <a:lstStyle/>
           <a:p>
-            <a:pPr indent="0" marL="0">
+            <a:pPr marL="0" indent="0">
               <a:buNone/>
             </a:pPr>
             <a:r>
@@ -5242,7 +5551,7 @@
           <a:bodyPr wrap="square" rtlCol="0" anchor="ctr"/>
           <a:lstStyle/>
           <a:p>
-            <a:pPr indent="0" marL="0">
+            <a:pPr marL="0" indent="0">
               <a:buNone/>
             </a:pPr>
             <a:r>
@@ -5276,15 +5585,27 @@
         </p:nvGraphicFramePr>
         <p:xfrm>
           <a:off x="365760" y="1508760"/>
-          <a:ext cx="8412480" cy="3200400"/>
+          <a:ext cx="8412480" cy="2852928"/>
         </p:xfrm>
         <a:graphic>
           <a:graphicData uri="http://schemas.openxmlformats.org/drawingml/2006/table">
             <a:tbl>
               <a:tblPr/>
               <a:tblGrid>
-                <a:gridCol w="2011680"/>
-                <a:gridCol w="6400800"/>
+                <a:gridCol w="2011680">
+                  <a:extLst>
+                    <a:ext uri="{9D8B030D-6E8A-4147-A177-3AD203B41FA5}">
+                      <a16:colId xmlns:a16="http://schemas.microsoft.com/office/drawing/2014/main" val="20000"/>
+                    </a:ext>
+                  </a:extLst>
+                </a:gridCol>
+                <a:gridCol w="6400800">
+                  <a:extLst>
+                    <a:ext uri="{9D8B030D-6E8A-4147-A177-3AD203B41FA5}">
+                      <a16:colId xmlns:a16="http://schemas.microsoft.com/office/drawing/2014/main" val="20001"/>
+                    </a:ext>
+                  </a:extLst>
+                </a:gridCol>
               </a:tblGrid>
               <a:tr h="713232">
                 <a:tc>
@@ -5292,7 +5613,7 @@
                     <a:bodyPr/>
                     <a:lstStyle/>
                     <a:p>
-                      <a:pPr indent="0" marL="0">
+                      <a:pPr marL="0" indent="0">
                         <a:buNone/>
                       </a:pPr>
                       <a:r>
@@ -5360,7 +5681,7 @@
                     <a:bodyPr/>
                     <a:lstStyle/>
                     <a:p>
-                      <a:pPr indent="0" marL="0">
+                      <a:pPr marL="0" indent="0">
                         <a:buNone/>
                       </a:pPr>
                       <a:r>
@@ -5423,6 +5744,11 @@
                     </a:solidFill>
                   </a:tcPr>
                 </a:tc>
+                <a:extLst>
+                  <a:ext uri="{0D108BD9-81ED-4DB2-BD59-A6C34878D82A}">
+                    <a16:rowId xmlns:a16="http://schemas.microsoft.com/office/drawing/2014/main" val="10000"/>
+                  </a:ext>
+                </a:extLst>
               </a:tr>
               <a:tr h="713232">
                 <a:tc>
@@ -5430,7 +5756,7 @@
                     <a:bodyPr/>
                     <a:lstStyle/>
                     <a:p>
-                      <a:pPr indent="0" marL="0">
+                      <a:pPr marL="0" indent="0">
                         <a:buNone/>
                       </a:pPr>
                       <a:r>
@@ -5498,7 +5824,7 @@
                     <a:bodyPr/>
                     <a:lstStyle/>
                     <a:p>
-                      <a:pPr indent="0" marL="0">
+                      <a:pPr marL="0" indent="0">
                         <a:buNone/>
                       </a:pPr>
                       <a:r>
@@ -5561,6 +5887,11 @@
                     </a:solidFill>
                   </a:tcPr>
                 </a:tc>
+                <a:extLst>
+                  <a:ext uri="{0D108BD9-81ED-4DB2-BD59-A6C34878D82A}">
+                    <a16:rowId xmlns:a16="http://schemas.microsoft.com/office/drawing/2014/main" val="10001"/>
+                  </a:ext>
+                </a:extLst>
               </a:tr>
               <a:tr h="713232">
                 <a:tc>
@@ -5568,7 +5899,7 @@
                     <a:bodyPr/>
                     <a:lstStyle/>
                     <a:p>
-                      <a:pPr indent="0" marL="0">
+                      <a:pPr marL="0" indent="0">
                         <a:buNone/>
                       </a:pPr>
                       <a:r>
@@ -5636,7 +5967,7 @@
                     <a:bodyPr/>
                     <a:lstStyle/>
                     <a:p>
-                      <a:pPr indent="0" marL="0">
+                      <a:pPr marL="0" indent="0">
                         <a:buNone/>
                       </a:pPr>
                       <a:r>
@@ -5699,6 +6030,11 @@
                     </a:solidFill>
                   </a:tcPr>
                 </a:tc>
+                <a:extLst>
+                  <a:ext uri="{0D108BD9-81ED-4DB2-BD59-A6C34878D82A}">
+                    <a16:rowId xmlns:a16="http://schemas.microsoft.com/office/drawing/2014/main" val="10002"/>
+                  </a:ext>
+                </a:extLst>
               </a:tr>
               <a:tr h="713232">
                 <a:tc>
@@ -5706,7 +6042,7 @@
                     <a:bodyPr/>
                     <a:lstStyle/>
                     <a:p>
-                      <a:pPr indent="0" marL="0">
+                      <a:pPr marL="0" indent="0">
                         <a:buNone/>
                       </a:pPr>
                       <a:r>
@@ -5774,7 +6110,7 @@
                     <a:bodyPr/>
                     <a:lstStyle/>
                     <a:p>
-                      <a:pPr indent="0" marL="0">
+                      <a:pPr marL="0" indent="0">
                         <a:buNone/>
                       </a:pPr>
                       <a:r>
@@ -5837,6 +6173,11 @@
                     </a:solidFill>
                   </a:tcPr>
                 </a:tc>
+                <a:extLst>
+                  <a:ext uri="{0D108BD9-81ED-4DB2-BD59-A6C34878D82A}">
+                    <a16:rowId xmlns:a16="http://schemas.microsoft.com/office/drawing/2014/main" val="10003"/>
+                  </a:ext>
+                </a:extLst>
               </a:tr>
             </a:tbl>
           </a:graphicData>
@@ -5852,12 +6193,286 @@
 
 <file path=ppt/slides/slide8.xml><?xml version="1.0" encoding="utf-8"?>
 <p:sld xmlns:a="http://schemas.openxmlformats.org/drawingml/2006/main" xmlns:r="http://schemas.openxmlformats.org/officeDocument/2006/relationships" xmlns:p="http://schemas.openxmlformats.org/presentationml/2006/main">
+  <p:cSld>
+    <p:bg>
+      <p:bgPr>
+        <a:solidFill>
+          <a:srgbClr val="FFFFFF"/>
+        </a:solidFill>
+        <a:effectLst/>
+      </p:bgPr>
+    </p:bg>
+    <p:spTree>
+      <p:nvGrpSpPr>
+        <p:cNvPr id="1" name="">
+          <a:extLst>
+            <a:ext uri="{FF2B5EF4-FFF2-40B4-BE49-F238E27FC236}">
+              <a16:creationId xmlns:a16="http://schemas.microsoft.com/office/drawing/2014/main" id="{AA90B9F9-8372-2E05-C86E-A1B27B100387}"/>
+            </a:ext>
+          </a:extLst>
+        </p:cNvPr>
+        <p:cNvGrpSpPr/>
+        <p:nvPr/>
+      </p:nvGrpSpPr>
+      <p:grpSpPr>
+        <a:xfrm>
+          <a:off x="0" y="0"/>
+          <a:ext cx="0" cy="0"/>
+          <a:chOff x="0" y="0"/>
+          <a:chExt cx="0" cy="0"/>
+        </a:xfrm>
+      </p:grpSpPr>
+      <p:sp>
+        <p:nvSpPr>
+          <p:cNvPr id="2" name="Shape 0">
+            <a:extLst>
+              <a:ext uri="{FF2B5EF4-FFF2-40B4-BE49-F238E27FC236}">
+                <a16:creationId xmlns:a16="http://schemas.microsoft.com/office/drawing/2014/main" id="{B835D0FA-95F5-B9DB-B584-CAB26D3A3D00}"/>
+              </a:ext>
+            </a:extLst>
+          </p:cNvPr>
+          <p:cNvSpPr/>
+          <p:nvPr/>
+        </p:nvSpPr>
+        <p:spPr>
+          <a:xfrm>
+            <a:off x="0" y="0"/>
+            <a:ext cx="9144000" cy="777240"/>
+          </a:xfrm>
+          <a:prstGeom prst="rect">
+            <a:avLst/>
+          </a:prstGeom>
+          <a:solidFill>
+            <a:srgbClr val="028090"/>
+          </a:solidFill>
+          <a:ln/>
+        </p:spPr>
+        <p:txBody>
+          <a:bodyPr/>
+          <a:lstStyle/>
+          <a:p>
+            <a:endParaRPr lang="en-GB"/>
+          </a:p>
+        </p:txBody>
+      </p:sp>
+      <p:sp>
+        <p:nvSpPr>
+          <p:cNvPr id="3" name="Text 1">
+            <a:extLst>
+              <a:ext uri="{FF2B5EF4-FFF2-40B4-BE49-F238E27FC236}">
+                <a16:creationId xmlns:a16="http://schemas.microsoft.com/office/drawing/2014/main" id="{982AD5E5-3B77-5710-711F-9B7BC5A00A16}"/>
+              </a:ext>
+            </a:extLst>
+          </p:cNvPr>
+          <p:cNvSpPr/>
+          <p:nvPr/>
+        </p:nvSpPr>
+        <p:spPr>
+          <a:xfrm>
+            <a:off x="365760" y="109728"/>
+            <a:ext cx="3657600" cy="274320"/>
+          </a:xfrm>
+          <a:prstGeom prst="rect">
+            <a:avLst/>
+          </a:prstGeom>
+          <a:noFill/>
+          <a:ln/>
+        </p:spPr>
+        <p:txBody>
+          <a:bodyPr wrap="square" rtlCol="0" anchor="ctr"/>
+          <a:lstStyle/>
+          <a:p>
+            <a:pPr marL="0" indent="0">
+              <a:buNone/>
+            </a:pPr>
+            <a:r>
+              <a:rPr lang="en-US" sz="900" kern="0" spc="300" dirty="0">
+                <a:solidFill>
+                  <a:srgbClr val="A7D8DC"/>
+                </a:solidFill>
+                <a:latin typeface="Calibri" pitchFamily="34" charset="0"/>
+                <a:ea typeface="Calibri" pitchFamily="34" charset="-122"/>
+                <a:cs typeface="Calibri" pitchFamily="34" charset="-120"/>
+              </a:rPr>
+              <a:t>DEBRIEF</a:t>
+            </a:r>
+            <a:endParaRPr lang="en-US" sz="900" dirty="0"/>
+          </a:p>
+        </p:txBody>
+      </p:sp>
+      <p:sp>
+        <p:nvSpPr>
+          <p:cNvPr id="4" name="Text 2">
+            <a:extLst>
+              <a:ext uri="{FF2B5EF4-FFF2-40B4-BE49-F238E27FC236}">
+                <a16:creationId xmlns:a16="http://schemas.microsoft.com/office/drawing/2014/main" id="{2D966574-C2EC-B70B-FC45-32011949C85C}"/>
+              </a:ext>
+            </a:extLst>
+          </p:cNvPr>
+          <p:cNvSpPr/>
+          <p:nvPr/>
+        </p:nvSpPr>
+        <p:spPr>
+          <a:xfrm>
+            <a:off x="365760" y="182880"/>
+            <a:ext cx="8229600" cy="502920"/>
+          </a:xfrm>
+          <a:prstGeom prst="rect">
+            <a:avLst/>
+          </a:prstGeom>
+          <a:noFill/>
+          <a:ln/>
+        </p:spPr>
+        <p:txBody>
+          <a:bodyPr wrap="square" rtlCol="0" anchor="ctr"/>
+          <a:lstStyle/>
+          <a:p>
+            <a:pPr marL="0" indent="0" algn="ctr">
+              <a:buNone/>
+            </a:pPr>
+            <a:r>
+              <a:rPr lang="en-US" sz="2200" dirty="0">
+                <a:solidFill>
+                  <a:schemeClr val="bg1"/>
+                </a:solidFill>
+              </a:rPr>
+              <a:t>16 Personalities Test</a:t>
+            </a:r>
+          </a:p>
+        </p:txBody>
+      </p:sp>
+      <p:sp>
+        <p:nvSpPr>
+          <p:cNvPr id="5" name="Text 3">
+            <a:extLst>
+              <a:ext uri="{FF2B5EF4-FFF2-40B4-BE49-F238E27FC236}">
+                <a16:creationId xmlns:a16="http://schemas.microsoft.com/office/drawing/2014/main" id="{20C73A09-522D-EEF9-2F2D-7F2461CE63EF}"/>
+              </a:ext>
+            </a:extLst>
+          </p:cNvPr>
+          <p:cNvSpPr/>
+          <p:nvPr/>
+        </p:nvSpPr>
+        <p:spPr>
+          <a:xfrm>
+            <a:off x="457200" y="914400"/>
+            <a:ext cx="8229600" cy="502920"/>
+          </a:xfrm>
+          <a:prstGeom prst="rect">
+            <a:avLst/>
+          </a:prstGeom>
+          <a:noFill/>
+          <a:ln/>
+        </p:spPr>
+        <p:txBody>
+          <a:bodyPr wrap="square" rtlCol="0" anchor="ctr"/>
+          <a:lstStyle/>
+          <a:p>
+            <a:pPr marL="0" indent="0">
+              <a:buNone/>
+            </a:pPr>
+            <a:r>
+              <a:rPr lang="en-US" sz="1300" dirty="0">
+                <a:solidFill>
+                  <a:srgbClr val="1E293B"/>
+                </a:solidFill>
+                <a:latin typeface="Calibri" pitchFamily="34" charset="0"/>
+                <a:ea typeface="Calibri" pitchFamily="34" charset="-122"/>
+                <a:cs typeface="Calibri" pitchFamily="34" charset="-120"/>
+              </a:rPr>
+              <a:t>Do the 16 personalities test and report and read more about your personality</a:t>
+            </a:r>
+            <a:endParaRPr lang="en-US" sz="1300" dirty="0"/>
+          </a:p>
+        </p:txBody>
+      </p:sp>
+      <p:sp>
+        <p:nvSpPr>
+          <p:cNvPr id="7" name="TextBox 6">
+            <a:extLst>
+              <a:ext uri="{FF2B5EF4-FFF2-40B4-BE49-F238E27FC236}">
+                <a16:creationId xmlns:a16="http://schemas.microsoft.com/office/drawing/2014/main" id="{E813C2D1-F240-5C97-45E5-549A7B4183A7}"/>
+              </a:ext>
+            </a:extLst>
+          </p:cNvPr>
+          <p:cNvSpPr txBox="1"/>
+          <p:nvPr/>
+        </p:nvSpPr>
+        <p:spPr>
+          <a:xfrm>
+            <a:off x="220980" y="4774168"/>
+            <a:ext cx="4572000" cy="369332"/>
+          </a:xfrm>
+          <a:prstGeom prst="rect">
+            <a:avLst/>
+          </a:prstGeom>
+          <a:noFill/>
+        </p:spPr>
+        <p:txBody>
+          <a:bodyPr wrap="square">
+            <a:spAutoFit/>
+          </a:bodyPr>
+          <a:lstStyle/>
+          <a:p>
+            <a:r>
+              <a:rPr lang="en-GB" dirty="0"/>
+              <a:t>https://www.16personalities.com/</a:t>
+            </a:r>
+          </a:p>
+        </p:txBody>
+      </p:sp>
+      <p:pic>
+        <p:nvPicPr>
+          <p:cNvPr id="9" name="Picture 8" descr="16 Personalities | Developer Experience Knowledge Base">
+            <a:extLst>
+              <a:ext uri="{FF2B5EF4-FFF2-40B4-BE49-F238E27FC236}">
+                <a16:creationId xmlns:a16="http://schemas.microsoft.com/office/drawing/2014/main" id="{2589AE58-D362-4666-87F5-982108C306D6}"/>
+              </a:ext>
+            </a:extLst>
+          </p:cNvPr>
+          <p:cNvPicPr>
+            <a:picLocks noChangeAspect="1"/>
+          </p:cNvPicPr>
+          <p:nvPr/>
+        </p:nvPicPr>
+        <p:blipFill>
+          <a:blip r:embed="rId3"/>
+          <a:stretch>
+            <a:fillRect/>
+          </a:stretch>
+        </p:blipFill>
+        <p:spPr>
+          <a:xfrm>
+            <a:off x="2950560" y="1622728"/>
+            <a:ext cx="3060000" cy="3060000"/>
+          </a:xfrm>
+          <a:prstGeom prst="rect">
+            <a:avLst/>
+          </a:prstGeom>
+        </p:spPr>
+      </p:pic>
+    </p:spTree>
+    <p:extLst>
+      <p:ext uri="{BB962C8B-B14F-4D97-AF65-F5344CB8AC3E}">
+        <p14:creationId xmlns:p14="http://schemas.microsoft.com/office/powerpoint/2010/main" val="207154335"/>
+      </p:ext>
+    </p:extLst>
+  </p:cSld>
+  <p:clrMapOvr>
+    <a:masterClrMapping/>
+  </p:clrMapOvr>
+</p:sld>
+</file>
+
+<file path=ppt/slides/slide9.xml><?xml version="1.0" encoding="utf-8"?>
+<p:sld xmlns:a="http://schemas.openxmlformats.org/drawingml/2006/main" xmlns:r="http://schemas.openxmlformats.org/officeDocument/2006/relationships" xmlns:p="http://schemas.openxmlformats.org/presentationml/2006/main">
   <p:cSld name="Slide 8">
     <p:bg>
       <p:bgPr>
         <a:solidFill>
           <a:srgbClr val="FFFFFF"/>
         </a:solidFill>
+        <a:effectLst/>
       </p:bgPr>
     </p:bg>
     <p:spTree>
@@ -5893,6 +6508,13 @@
           </a:solidFill>
           <a:ln/>
         </p:spPr>
+        <p:txBody>
+          <a:bodyPr/>
+          <a:lstStyle/>
+          <a:p>
+            <a:endParaRPr lang="en-GB"/>
+          </a:p>
+        </p:txBody>
       </p:sp>
       <p:sp>
         <p:nvSpPr>
@@ -5915,11 +6537,11 @@
           <a:bodyPr wrap="square" rtlCol="0" anchor="ctr"/>
           <a:lstStyle/>
           <a:p>
-            <a:pPr indent="0" marL="0">
-              <a:buNone/>
-            </a:pPr>
-            <a:r>
-              <a:rPr lang="en-US" sz="900" spc="300" kern="0" dirty="0">
+            <a:pPr marL="0" indent="0">
+              <a:buNone/>
+            </a:pPr>
+            <a:r>
+              <a:rPr lang="en-US" sz="900" kern="0" spc="300" dirty="0">
                 <a:solidFill>
                   <a:srgbClr val="A7D8DC"/>
                 </a:solidFill>
@@ -5954,7 +6576,7 @@
           <a:bodyPr wrap="square" rtlCol="0" anchor="ctr"/>
           <a:lstStyle/>
           <a:p>
-            <a:pPr indent="0" marL="0">
+            <a:pPr marL="0" indent="0">
               <a:buNone/>
             </a:pPr>
             <a:r>
@@ -5993,7 +6615,7 @@
           <a:bodyPr wrap="square" rtlCol="0" anchor="ctr"/>
           <a:lstStyle/>
           <a:p>
-            <a:pPr indent="0" marL="0">
+            <a:pPr marL="0" indent="0">
               <a:buNone/>
             </a:pPr>
             <a:r>
@@ -6030,6 +6652,13 @@
           </a:solidFill>
           <a:ln/>
         </p:spPr>
+        <p:txBody>
+          <a:bodyPr/>
+          <a:lstStyle/>
+          <a:p>
+            <a:endParaRPr lang="en-GB"/>
+          </a:p>
+        </p:txBody>
       </p:sp>
       <p:sp>
         <p:nvSpPr>
@@ -6050,6 +6679,13 @@
           </a:solidFill>
           <a:ln/>
         </p:spPr>
+        <p:txBody>
+          <a:bodyPr/>
+          <a:lstStyle/>
+          <a:p>
+            <a:endParaRPr lang="en-GB"/>
+          </a:p>
+        </p:txBody>
       </p:sp>
       <p:sp>
         <p:nvSpPr>
@@ -6072,7 +6708,7 @@
           <a:bodyPr wrap="square" lIns="0" tIns="0" rIns="0" bIns="0" rtlCol="0" anchor="ctr"/>
           <a:lstStyle/>
           <a:p>
-            <a:pPr indent="0" marL="0">
+            <a:pPr marL="0" indent="0">
               <a:buNone/>
             </a:pPr>
             <a:r>
@@ -6111,7 +6747,7 @@
           <a:bodyPr wrap="square" rtlCol="0" anchor="ctr"/>
           <a:lstStyle/>
           <a:p>
-            <a:pPr indent="0" marL="0">
+            <a:pPr marL="0" indent="0">
               <a:buNone/>
             </a:pPr>
             <a:r>
@@ -6148,6 +6784,13 @@
           </a:solidFill>
           <a:ln/>
         </p:spPr>
+        <p:txBody>
+          <a:bodyPr/>
+          <a:lstStyle/>
+          <a:p>
+            <a:endParaRPr lang="en-GB"/>
+          </a:p>
+        </p:txBody>
       </p:sp>
       <p:sp>
         <p:nvSpPr>
@@ -6168,6 +6811,13 @@
           </a:solidFill>
           <a:ln/>
         </p:spPr>
+        <p:txBody>
+          <a:bodyPr/>
+          <a:lstStyle/>
+          <a:p>
+            <a:endParaRPr lang="en-GB"/>
+          </a:p>
+        </p:txBody>
       </p:sp>
       <p:sp>
         <p:nvSpPr>
@@ -6190,7 +6840,7 @@
           <a:bodyPr wrap="square" lIns="0" tIns="0" rIns="0" bIns="0" rtlCol="0" anchor="ctr"/>
           <a:lstStyle/>
           <a:p>
-            <a:pPr indent="0" marL="0">
+            <a:pPr marL="0" indent="0">
               <a:buNone/>
             </a:pPr>
             <a:r>
@@ -6229,7 +6879,7 @@
           <a:bodyPr wrap="square" rtlCol="0" anchor="ctr"/>
           <a:lstStyle/>
           <a:p>
-            <a:pPr indent="0" marL="0">
+            <a:pPr marL="0" indent="0">
               <a:buNone/>
             </a:pPr>
             <a:r>
@@ -6266,6 +6916,13 @@
           </a:solidFill>
           <a:ln/>
         </p:spPr>
+        <p:txBody>
+          <a:bodyPr/>
+          <a:lstStyle/>
+          <a:p>
+            <a:endParaRPr lang="en-GB"/>
+          </a:p>
+        </p:txBody>
       </p:sp>
       <p:sp>
         <p:nvSpPr>
@@ -6286,6 +6943,13 @@
           </a:solidFill>
           <a:ln/>
         </p:spPr>
+        <p:txBody>
+          <a:bodyPr/>
+          <a:lstStyle/>
+          <a:p>
+            <a:endParaRPr lang="en-GB"/>
+          </a:p>
+        </p:txBody>
       </p:sp>
       <p:sp>
         <p:nvSpPr>
@@ -6308,7 +6972,7 @@
           <a:bodyPr wrap="square" lIns="0" tIns="0" rIns="0" bIns="0" rtlCol="0" anchor="ctr"/>
           <a:lstStyle/>
           <a:p>
-            <a:pPr indent="0" marL="0">
+            <a:pPr marL="0" indent="0">
               <a:buNone/>
             </a:pPr>
             <a:r>
@@ -6347,7 +7011,7 @@
           <a:bodyPr wrap="square" rtlCol="0" anchor="ctr"/>
           <a:lstStyle/>
           <a:p>
-            <a:pPr indent="0" marL="0">
+            <a:pPr marL="0" indent="0">
               <a:buNone/>
             </a:pPr>
             <a:r>
@@ -6384,6 +7048,13 @@
           </a:solidFill>
           <a:ln/>
         </p:spPr>
+        <p:txBody>
+          <a:bodyPr/>
+          <a:lstStyle/>
+          <a:p>
+            <a:endParaRPr lang="en-GB"/>
+          </a:p>
+        </p:txBody>
       </p:sp>
       <p:sp>
         <p:nvSpPr>
@@ -6404,6 +7075,13 @@
           </a:solidFill>
           <a:ln/>
         </p:spPr>
+        <p:txBody>
+          <a:bodyPr/>
+          <a:lstStyle/>
+          <a:p>
+            <a:endParaRPr lang="en-GB"/>
+          </a:p>
+        </p:txBody>
       </p:sp>
       <p:sp>
         <p:nvSpPr>
@@ -6426,7 +7104,7 @@
           <a:bodyPr wrap="square" lIns="0" tIns="0" rIns="0" bIns="0" rtlCol="0" anchor="ctr"/>
           <a:lstStyle/>
           <a:p>
-            <a:pPr indent="0" marL="0">
+            <a:pPr marL="0" indent="0">
               <a:buNone/>
             </a:pPr>
             <a:r>
@@ -6465,7 +7143,7 @@
           <a:bodyPr wrap="square" rtlCol="0" anchor="ctr"/>
           <a:lstStyle/>
           <a:p>
-            <a:pPr indent="0" marL="0">
+            <a:pPr marL="0" indent="0">
               <a:buNone/>
             </a:pPr>
             <a:r>
@@ -6480,192 +7158,6 @@
               <a:t>So you can check in with yourself on Day 5</a:t>
             </a:r>
             <a:endParaRPr lang="en-US" sz="1200" dirty="0"/>
-          </a:p>
-        </p:txBody>
-      </p:sp>
-    </p:spTree>
-  </p:cSld>
-  <p:clrMapOvr>
-    <a:masterClrMapping/>
-  </p:clrMapOvr>
-</p:sld>
-</file>
-
-<file path=ppt/slides/slide9.xml><?xml version="1.0" encoding="utf-8"?>
-<p:sld xmlns:a="http://schemas.openxmlformats.org/drawingml/2006/main" xmlns:r="http://schemas.openxmlformats.org/officeDocument/2006/relationships" xmlns:p="http://schemas.openxmlformats.org/presentationml/2006/main">
-  <p:cSld name="Slide 9">
-    <p:bg>
-      <p:bgPr>
-        <a:solidFill>
-          <a:srgbClr val="028090"/>
-        </a:solidFill>
-      </p:bgPr>
-    </p:bg>
-    <p:spTree>
-      <p:nvGrpSpPr>
-        <p:cNvPr id="1" name=""/>
-        <p:cNvGrpSpPr/>
-        <p:nvPr/>
-      </p:nvGrpSpPr>
-      <p:grpSpPr>
-        <a:xfrm>
-          <a:off x="0" y="0"/>
-          <a:ext cx="0" cy="0"/>
-          <a:chOff x="0" y="0"/>
-          <a:chExt cx="0" cy="0"/>
-        </a:xfrm>
-      </p:grpSpPr>
-      <p:sp>
-        <p:nvSpPr>
-          <p:cNvPr id="2" name="Shape 0"/>
-          <p:cNvSpPr/>
-          <p:nvPr/>
-        </p:nvSpPr>
-        <p:spPr>
-          <a:xfrm>
-            <a:off x="0" y="0"/>
-            <a:ext cx="109728" cy="5143500"/>
-          </a:xfrm>
-          <a:prstGeom prst="rect">
-            <a:avLst/>
-          </a:prstGeom>
-          <a:solidFill>
-            <a:srgbClr val="EF9F27"/>
-          </a:solidFill>
-          <a:ln/>
-        </p:spPr>
-      </p:sp>
-      <p:sp>
-        <p:nvSpPr>
-          <p:cNvPr id="3" name="Text 1"/>
-          <p:cNvSpPr/>
-          <p:nvPr/>
-        </p:nvSpPr>
-        <p:spPr>
-          <a:xfrm>
-            <a:off x="365760" y="1371600"/>
-            <a:ext cx="8229600" cy="457200"/>
-          </a:xfrm>
-          <a:prstGeom prst="rect">
-            <a:avLst/>
-          </a:prstGeom>
-          <a:noFill/>
-          <a:ln/>
-        </p:spPr>
-        <p:txBody>
-          <a:bodyPr wrap="square" rtlCol="0" anchor="ctr"/>
-          <a:lstStyle/>
-          <a:p>
-            <a:pPr indent="0" marL="0">
-              <a:buNone/>
-            </a:pPr>
-            <a:r>
-              <a:rPr lang="en-US" sz="1400" spc="300" kern="0" dirty="0">
-                <a:solidFill>
-                  <a:srgbClr val="A7D8DC"/>
-                </a:solidFill>
-                <a:latin typeface="Calibri" pitchFamily="34" charset="0"/>
-                <a:ea typeface="Calibri" pitchFamily="34" charset="-122"/>
-                <a:cs typeface="Calibri" pitchFamily="34" charset="-120"/>
-              </a:rPr>
-              <a:t>Up next</a:t>
-            </a:r>
-            <a:endParaRPr lang="en-US" sz="1400" dirty="0"/>
-          </a:p>
-        </p:txBody>
-      </p:sp>
-      <p:sp>
-        <p:nvSpPr>
-          <p:cNvPr id="4" name="Text 2"/>
-          <p:cNvSpPr/>
-          <p:nvPr/>
-        </p:nvSpPr>
-        <p:spPr>
-          <a:xfrm>
-            <a:off x="365760" y="1920240"/>
-            <a:ext cx="8229600" cy="1645920"/>
-          </a:xfrm>
-          <a:prstGeom prst="rect">
-            <a:avLst/>
-          </a:prstGeom>
-          <a:noFill/>
-          <a:ln/>
-        </p:spPr>
-        <p:txBody>
-          <a:bodyPr wrap="square" rtlCol="0" anchor="ctr"/>
-          <a:lstStyle/>
-          <a:p>
-            <a:pPr indent="0" marL="0">
-              <a:buNone/>
-            </a:pPr>
-            <a:r>
-              <a:rPr lang="en-US" sz="3200" b="1" dirty="0">
-                <a:solidFill>
-                  <a:srgbClr val="FFFFFF"/>
-                </a:solidFill>
-                <a:latin typeface="Calibri" pitchFamily="34" charset="0"/>
-                <a:ea typeface="Calibri" pitchFamily="34" charset="-122"/>
-                <a:cs typeface="Calibri" pitchFamily="34" charset="-120"/>
-              </a:rPr>
-              <a:t>Team Building Activity</a:t>
-            </a:r>
-            <a:endParaRPr lang="en-US" sz="3200" dirty="0"/>
-          </a:p>
-          <a:p>
-            <a:pPr indent="0" marL="0">
-              <a:buNone/>
-            </a:pPr>
-            <a:r>
-              <a:rPr lang="en-US" sz="3200" b="1" dirty="0">
-                <a:solidFill>
-                  <a:srgbClr val="FFFFFF"/>
-                </a:solidFill>
-                <a:latin typeface="Calibri" pitchFamily="34" charset="0"/>
-                <a:ea typeface="Calibri" pitchFamily="34" charset="-122"/>
-                <a:cs typeface="Calibri" pitchFamily="34" charset="-120"/>
-              </a:rPr>
-              <a:t>&amp; Team Formation</a:t>
-            </a:r>
-            <a:endParaRPr lang="en-US" sz="3200" dirty="0"/>
-          </a:p>
-        </p:txBody>
-      </p:sp>
-      <p:sp>
-        <p:nvSpPr>
-          <p:cNvPr id="5" name="Text 3"/>
-          <p:cNvSpPr/>
-          <p:nvPr/>
-        </p:nvSpPr>
-        <p:spPr>
-          <a:xfrm>
-            <a:off x="365760" y="3749040"/>
-            <a:ext cx="8229600" cy="457200"/>
-          </a:xfrm>
-          <a:prstGeom prst="rect">
-            <a:avLst/>
-          </a:prstGeom>
-          <a:noFill/>
-          <a:ln/>
-        </p:spPr>
-        <p:txBody>
-          <a:bodyPr wrap="square" rtlCol="0" anchor="ctr"/>
-          <a:lstStyle/>
-          <a:p>
-            <a:pPr indent="0" marL="0">
-              <a:buNone/>
-            </a:pPr>
-            <a:r>
-              <a:rPr lang="en-US" sz="1400" dirty="0">
-                <a:solidFill>
-                  <a:srgbClr val="A7D8DC"/>
-                </a:solidFill>
-                <a:latin typeface="Calibri" pitchFamily="34" charset="0"/>
-                <a:ea typeface="Calibri" pitchFamily="34" charset="-122"/>
-                <a:cs typeface="Calibri" pitchFamily="34" charset="-120"/>
-              </a:rPr>
-              <a:t>Day 1 · Session 2 — This afternoon</a:t>
-            </a:r>
-            <a:endParaRPr lang="en-US" sz="1400" dirty="0"/>
           </a:p>
         </p:txBody>
       </p:sp>
@@ -6970,4 +7462,319 @@
     </a:ext>
   </a:extLst>
 </a:theme>
+</file>
+
+<file path=ppt/theme/theme2.xml><?xml version="1.0" encoding="utf-8"?>
+<a:theme xmlns:a="http://schemas.openxmlformats.org/drawingml/2006/main" name="Office Theme">
+  <a:themeElements>
+    <a:clrScheme name="Office">
+      <a:dk1>
+        <a:sysClr val="windowText" lastClr="000000"/>
+      </a:dk1>
+      <a:lt1>
+        <a:sysClr val="window" lastClr="FFFFFF"/>
+      </a:lt1>
+      <a:dk2>
+        <a:srgbClr val="0E2841"/>
+      </a:dk2>
+      <a:lt2>
+        <a:srgbClr val="E8E8E8"/>
+      </a:lt2>
+      <a:accent1>
+        <a:srgbClr val="156082"/>
+      </a:accent1>
+      <a:accent2>
+        <a:srgbClr val="E97132"/>
+      </a:accent2>
+      <a:accent3>
+        <a:srgbClr val="196B24"/>
+      </a:accent3>
+      <a:accent4>
+        <a:srgbClr val="0F9ED5"/>
+      </a:accent4>
+      <a:accent5>
+        <a:srgbClr val="A02B93"/>
+      </a:accent5>
+      <a:accent6>
+        <a:srgbClr val="4EA72E"/>
+      </a:accent6>
+      <a:hlink>
+        <a:srgbClr val="467886"/>
+      </a:hlink>
+      <a:folHlink>
+        <a:srgbClr val="96607D"/>
+      </a:folHlink>
+    </a:clrScheme>
+    <a:fontScheme name="Office">
+      <a:majorFont>
+        <a:latin typeface="Aptos Display" panose="02110004020202020204"/>
+        <a:ea typeface=""/>
+        <a:cs typeface=""/>
+        <a:font script="Jpan" typeface="游ゴシック Light"/>
+        <a:font script="Hang" typeface="맑은 고딕"/>
+        <a:font script="Hans" typeface="等线 Light"/>
+        <a:font script="Hant" typeface="新細明體"/>
+        <a:font script="Arab" typeface="Times New Roman"/>
+        <a:font script="Hebr" typeface="Times New Roman"/>
+        <a:font script="Thai" typeface="Angsana New"/>
+        <a:font script="Ethi" typeface="Nyala"/>
+        <a:font script="Beng" typeface="Vrinda"/>
+        <a:font script="Gujr" typeface="Shruti"/>
+        <a:font script="Khmr" typeface="MoolBoran"/>
+        <a:font script="Knda" typeface="Tunga"/>
+        <a:font script="Guru" typeface="Raavi"/>
+        <a:font script="Cans" typeface="Euphemia"/>
+        <a:font script="Cher" typeface="Plantagenet Cherokee"/>
+        <a:font script="Yiii" typeface="Microsoft Yi Baiti"/>
+        <a:font script="Tibt" typeface="Microsoft Himalaya"/>
+        <a:font script="Thaa" typeface="MV Boli"/>
+        <a:font script="Deva" typeface="Mangal"/>
+        <a:font script="Telu" typeface="Gautami"/>
+        <a:font script="Taml" typeface="Latha"/>
+        <a:font script="Syrc" typeface="Estrangelo Edessa"/>
+        <a:font script="Orya" typeface="Kalinga"/>
+        <a:font script="Mlym" typeface="Kartika"/>
+        <a:font script="Laoo" typeface="DokChampa"/>
+        <a:font script="Sinh" typeface="Iskoola Pota"/>
+        <a:font script="Mong" typeface="Mongolian Baiti"/>
+        <a:font script="Viet" typeface="Times New Roman"/>
+        <a:font script="Uigh" typeface="Microsoft Uighur"/>
+        <a:font script="Geor" typeface="Sylfaen"/>
+        <a:font script="Armn" typeface="Arial"/>
+        <a:font script="Bugi" typeface="Leelawadee UI"/>
+        <a:font script="Bopo" typeface="Microsoft JhengHei"/>
+        <a:font script="Java" typeface="Javanese Text"/>
+        <a:font script="Lisu" typeface="Segoe UI"/>
+        <a:font script="Mymr" typeface="Myanmar Text"/>
+        <a:font script="Nkoo" typeface="Ebrima"/>
+        <a:font script="Olck" typeface="Nirmala UI"/>
+        <a:font script="Osma" typeface="Ebrima"/>
+        <a:font script="Phag" typeface="Phagspa"/>
+        <a:font script="Syrn" typeface="Estrangelo Edessa"/>
+        <a:font script="Syrj" typeface="Estrangelo Edessa"/>
+        <a:font script="Syre" typeface="Estrangelo Edessa"/>
+        <a:font script="Sora" typeface="Nirmala UI"/>
+        <a:font script="Tale" typeface="Microsoft Tai Le"/>
+        <a:font script="Talu" typeface="Microsoft New Tai Lue"/>
+        <a:font script="Tfng" typeface="Ebrima"/>
+      </a:majorFont>
+      <a:minorFont>
+        <a:latin typeface="Aptos" panose="02110004020202020204"/>
+        <a:ea typeface=""/>
+        <a:cs typeface=""/>
+        <a:font script="Jpan" typeface="游ゴシック"/>
+        <a:font script="Hang" typeface="맑은 고딕"/>
+        <a:font script="Hans" typeface="等线"/>
+        <a:font script="Hant" typeface="新細明體"/>
+        <a:font script="Arab" typeface="Arial"/>
+        <a:font script="Hebr" typeface="Arial"/>
+        <a:font script="Thai" typeface="Cordia New"/>
+        <a:font script="Ethi" typeface="Nyala"/>
+        <a:font script="Beng" typeface="Vrinda"/>
+        <a:font script="Gujr" typeface="Shruti"/>
+        <a:font script="Khmr" typeface="DaunPenh"/>
+        <a:font script="Knda" typeface="Tunga"/>
+        <a:font script="Guru" typeface="Raavi"/>
+        <a:font script="Cans" typeface="Euphemia"/>
+        <a:font script="Cher" typeface="Plantagenet Cherokee"/>
+        <a:font script="Yiii" typeface="Microsoft Yi Baiti"/>
+        <a:font script="Tibt" typeface="Microsoft Himalaya"/>
+        <a:font script="Thaa" typeface="MV Boli"/>
+        <a:font script="Deva" typeface="Mangal"/>
+        <a:font script="Telu" typeface="Gautami"/>
+        <a:font script="Taml" typeface="Latha"/>
+        <a:font script="Syrc" typeface="Estrangelo Edessa"/>
+        <a:font script="Orya" typeface="Kalinga"/>
+        <a:font script="Mlym" typeface="Kartika"/>
+        <a:font script="Laoo" typeface="DokChampa"/>
+        <a:font script="Sinh" typeface="Iskoola Pota"/>
+        <a:font script="Mong" typeface="Mongolian Baiti"/>
+        <a:font script="Viet" typeface="Arial"/>
+        <a:font script="Uigh" typeface="Microsoft Uighur"/>
+        <a:font script="Geor" typeface="Sylfaen"/>
+        <a:font script="Armn" typeface="Arial"/>
+        <a:font script="Bugi" typeface="Leelawadee UI"/>
+        <a:font script="Bopo" typeface="Microsoft JhengHei"/>
+        <a:font script="Java" typeface="Javanese Text"/>
+        <a:font script="Lisu" typeface="Segoe UI"/>
+        <a:font script="Mymr" typeface="Myanmar Text"/>
+        <a:font script="Nkoo" typeface="Ebrima"/>
+        <a:font script="Olck" typeface="Nirmala UI"/>
+        <a:font script="Osma" typeface="Ebrima"/>
+        <a:font script="Phag" typeface="Phagspa"/>
+        <a:font script="Syrn" typeface="Estrangelo Edessa"/>
+        <a:font script="Syrj" typeface="Estrangelo Edessa"/>
+        <a:font script="Syre" typeface="Estrangelo Edessa"/>
+        <a:font script="Sora" typeface="Nirmala UI"/>
+        <a:font script="Tale" typeface="Microsoft Tai Le"/>
+        <a:font script="Talu" typeface="Microsoft New Tai Lue"/>
+        <a:font script="Tfng" typeface="Ebrima"/>
+      </a:minorFont>
+    </a:fontScheme>
+    <a:fmtScheme name="Office">
+      <a:fillStyleLst>
+        <a:solidFill>
+          <a:schemeClr val="phClr"/>
+        </a:solidFill>
+        <a:gradFill rotWithShape="1">
+          <a:gsLst>
+            <a:gs pos="0">
+              <a:schemeClr val="phClr">
+                <a:lumMod val="110000"/>
+                <a:satMod val="105000"/>
+                <a:tint val="67000"/>
+              </a:schemeClr>
+            </a:gs>
+            <a:gs pos="50000">
+              <a:schemeClr val="phClr">
+                <a:lumMod val="105000"/>
+                <a:satMod val="103000"/>
+                <a:tint val="73000"/>
+              </a:schemeClr>
+            </a:gs>
+            <a:gs pos="100000">
+              <a:schemeClr val="phClr">
+                <a:lumMod val="105000"/>
+                <a:satMod val="109000"/>
+                <a:tint val="81000"/>
+              </a:schemeClr>
+            </a:gs>
+          </a:gsLst>
+          <a:lin ang="5400000" scaled="0"/>
+        </a:gradFill>
+        <a:gradFill rotWithShape="1">
+          <a:gsLst>
+            <a:gs pos="0">
+              <a:schemeClr val="phClr">
+                <a:satMod val="103000"/>
+                <a:lumMod val="102000"/>
+                <a:tint val="94000"/>
+              </a:schemeClr>
+            </a:gs>
+            <a:gs pos="50000">
+              <a:schemeClr val="phClr">
+                <a:satMod val="110000"/>
+                <a:lumMod val="100000"/>
+                <a:shade val="100000"/>
+              </a:schemeClr>
+            </a:gs>
+            <a:gs pos="100000">
+              <a:schemeClr val="phClr">
+                <a:lumMod val="99000"/>
+                <a:satMod val="120000"/>
+                <a:shade val="78000"/>
+              </a:schemeClr>
+            </a:gs>
+          </a:gsLst>
+          <a:lin ang="5400000" scaled="0"/>
+        </a:gradFill>
+      </a:fillStyleLst>
+      <a:lnStyleLst>
+        <a:ln w="12700" cap="flat" cmpd="sng" algn="ctr">
+          <a:solidFill>
+            <a:schemeClr val="phClr"/>
+          </a:solidFill>
+          <a:prstDash val="solid"/>
+          <a:miter lim="800000"/>
+        </a:ln>
+        <a:ln w="19050" cap="flat" cmpd="sng" algn="ctr">
+          <a:solidFill>
+            <a:schemeClr val="phClr"/>
+          </a:solidFill>
+          <a:prstDash val="solid"/>
+          <a:miter lim="800000"/>
+        </a:ln>
+        <a:ln w="25400" cap="flat" cmpd="sng" algn="ctr">
+          <a:solidFill>
+            <a:schemeClr val="phClr"/>
+          </a:solidFill>
+          <a:prstDash val="solid"/>
+          <a:miter lim="800000"/>
+        </a:ln>
+      </a:lnStyleLst>
+      <a:effectStyleLst>
+        <a:effectStyle>
+          <a:effectLst/>
+        </a:effectStyle>
+        <a:effectStyle>
+          <a:effectLst/>
+        </a:effectStyle>
+        <a:effectStyle>
+          <a:effectLst>
+            <a:outerShdw blurRad="57150" dist="19050" dir="5400000" algn="ctr" rotWithShape="0">
+              <a:srgbClr val="000000">
+                <a:alpha val="63000"/>
+              </a:srgbClr>
+            </a:outerShdw>
+          </a:effectLst>
+        </a:effectStyle>
+      </a:effectStyleLst>
+      <a:bgFillStyleLst>
+        <a:solidFill>
+          <a:schemeClr val="phClr"/>
+        </a:solidFill>
+        <a:solidFill>
+          <a:schemeClr val="phClr">
+            <a:tint val="95000"/>
+            <a:satMod val="170000"/>
+          </a:schemeClr>
+        </a:solidFill>
+        <a:gradFill rotWithShape="1">
+          <a:gsLst>
+            <a:gs pos="0">
+              <a:schemeClr val="phClr">
+                <a:tint val="93000"/>
+                <a:satMod val="150000"/>
+                <a:shade val="98000"/>
+                <a:lumMod val="102000"/>
+              </a:schemeClr>
+            </a:gs>
+            <a:gs pos="50000">
+              <a:schemeClr val="phClr">
+                <a:tint val="98000"/>
+                <a:satMod val="130000"/>
+                <a:shade val="90000"/>
+                <a:lumMod val="103000"/>
+              </a:schemeClr>
+            </a:gs>
+            <a:gs pos="100000">
+              <a:schemeClr val="phClr">
+                <a:shade val="63000"/>
+                <a:satMod val="120000"/>
+              </a:schemeClr>
+            </a:gs>
+          </a:gsLst>
+          <a:lin ang="5400000" scaled="0"/>
+        </a:gradFill>
+      </a:bgFillStyleLst>
+    </a:fmtScheme>
+  </a:themeElements>
+  <a:objectDefaults>
+    <a:lnDef>
+      <a:spPr/>
+      <a:bodyPr/>
+      <a:lstStyle/>
+      <a:style>
+        <a:lnRef idx="2">
+          <a:schemeClr val="accent1"/>
+        </a:lnRef>
+        <a:fillRef idx="0">
+          <a:schemeClr val="accent1"/>
+        </a:fillRef>
+        <a:effectRef idx="1">
+          <a:schemeClr val="accent1"/>
+        </a:effectRef>
+        <a:fontRef idx="minor">
+          <a:schemeClr val="tx1"/>
+        </a:fontRef>
+      </a:style>
+    </a:lnDef>
+  </a:objectDefaults>
+  <a:extraClrSchemeLst/>
+  <a:extLst>
+    <a:ext uri="{05A4C25C-085E-4340-85A3-A5531E510DB2}">
+      <thm15:themeFamily xmlns:thm15="http://schemas.microsoft.com/office/thememl/2012/main" name="Office Theme" id="{2E142A2C-CD16-42D6-873A-C26D2A0506FA}" vid="{1BDDFF52-6CD6-40A5-AB3C-68EB2F1E4D0A}"/>
+    </a:ext>
+  </a:extLst>
+</a:theme>
 </file>